--- a/モデリング/三ノ輪/三ノ輪.pptx
+++ b/モデリング/三ノ輪/三ノ輪.pptx
@@ -4,13 +4,18 @@
   <p:sldMasterIdLst>
     <p:sldMasterId id="2147483648" r:id="rId1"/>
   </p:sldMasterIdLst>
+  <p:notesMasterIdLst>
+    <p:notesMasterId r:id="rId10"/>
+  </p:notesMasterIdLst>
   <p:sldIdLst>
     <p:sldId id="256" r:id="rId2"/>
     <p:sldId id="259" r:id="rId3"/>
-    <p:sldId id="260" r:id="rId4"/>
-    <p:sldId id="258" r:id="rId5"/>
-    <p:sldId id="261" r:id="rId6"/>
-    <p:sldId id="262" r:id="rId7"/>
+    <p:sldId id="263" r:id="rId4"/>
+    <p:sldId id="260" r:id="rId5"/>
+    <p:sldId id="258" r:id="rId6"/>
+    <p:sldId id="261" r:id="rId7"/>
+    <p:sldId id="262" r:id="rId8"/>
+    <p:sldId id="264" r:id="rId9"/>
   </p:sldIdLst>
   <p:sldSz cx="12192000" cy="6858000"/>
   <p:notesSz cx="6858000" cy="9144000"/>
@@ -117,6 +122,440 @@
 </p:presentation>
 </file>
 
+<file path=ppt/notesMasters/notesMaster1.xml><?xml version="1.0" encoding="utf-8"?>
+<p:notesMaster xmlns:a="http://schemas.openxmlformats.org/drawingml/2006/main" xmlns:r="http://schemas.openxmlformats.org/officeDocument/2006/relationships" xmlns:p="http://schemas.openxmlformats.org/presentationml/2006/main">
+  <p:cSld>
+    <p:bg>
+      <p:bgRef idx="1001">
+        <a:schemeClr val="bg1"/>
+      </p:bgRef>
+    </p:bg>
+    <p:spTree>
+      <p:nvGrpSpPr>
+        <p:cNvPr id="1" name=""/>
+        <p:cNvGrpSpPr/>
+        <p:nvPr/>
+      </p:nvGrpSpPr>
+      <p:grpSpPr>
+        <a:xfrm>
+          <a:off x="0" y="0"/>
+          <a:ext cx="0" cy="0"/>
+          <a:chOff x="0" y="0"/>
+          <a:chExt cx="0" cy="0"/>
+        </a:xfrm>
+      </p:grpSpPr>
+      <p:sp>
+        <p:nvSpPr>
+          <p:cNvPr id="2" name="Header Placeholder 1"/>
+          <p:cNvSpPr>
+            <a:spLocks noGrp="1"/>
+          </p:cNvSpPr>
+          <p:nvPr>
+            <p:ph type="hdr" sz="quarter"/>
+          </p:nvPr>
+        </p:nvSpPr>
+        <p:spPr>
+          <a:xfrm>
+            <a:off x="0" y="0"/>
+            <a:ext cx="2971800" cy="458788"/>
+          </a:xfrm>
+          <a:prstGeom prst="rect">
+            <a:avLst/>
+          </a:prstGeom>
+        </p:spPr>
+        <p:txBody>
+          <a:bodyPr vert="horz" lIns="91440" tIns="45720" rIns="91440" bIns="45720" rtlCol="0"/>
+          <a:lstStyle>
+            <a:lvl1pPr algn="l">
+              <a:defRPr sz="1200"/>
+            </a:lvl1pPr>
+          </a:lstStyle>
+          <a:p>
+            <a:endParaRPr kumimoji="1" lang="ja-JP" altLang="en-US"/>
+          </a:p>
+        </p:txBody>
+      </p:sp>
+      <p:sp>
+        <p:nvSpPr>
+          <p:cNvPr id="3" name="Date Placeholder 2"/>
+          <p:cNvSpPr>
+            <a:spLocks noGrp="1"/>
+          </p:cNvSpPr>
+          <p:nvPr>
+            <p:ph type="dt" idx="1"/>
+          </p:nvPr>
+        </p:nvSpPr>
+        <p:spPr>
+          <a:xfrm>
+            <a:off x="3884613" y="0"/>
+            <a:ext cx="2971800" cy="458788"/>
+          </a:xfrm>
+          <a:prstGeom prst="rect">
+            <a:avLst/>
+          </a:prstGeom>
+        </p:spPr>
+        <p:txBody>
+          <a:bodyPr vert="horz" lIns="91440" tIns="45720" rIns="91440" bIns="45720" rtlCol="0"/>
+          <a:lstStyle>
+            <a:lvl1pPr algn="r">
+              <a:defRPr sz="1200"/>
+            </a:lvl1pPr>
+          </a:lstStyle>
+          <a:p>
+            <a:fld id="{4C4C8AD9-196A-409B-8583-68DCBA48D2B7}" type="datetimeFigureOut">
+              <a:rPr kumimoji="1" lang="ja-JP" altLang="en-US" smtClean="0"/>
+              <a:t>2025/11/6</a:t>
+            </a:fld>
+            <a:endParaRPr kumimoji="1" lang="ja-JP" altLang="en-US"/>
+          </a:p>
+        </p:txBody>
+      </p:sp>
+      <p:sp>
+        <p:nvSpPr>
+          <p:cNvPr id="4" name="Slide Image Placeholder 3"/>
+          <p:cNvSpPr>
+            <a:spLocks noGrp="1" noRot="1" noChangeAspect="1"/>
+          </p:cNvSpPr>
+          <p:nvPr>
+            <p:ph type="sldImg" idx="2"/>
+          </p:nvPr>
+        </p:nvSpPr>
+        <p:spPr>
+          <a:xfrm>
+            <a:off x="685800" y="1143000"/>
+            <a:ext cx="5486400" cy="3086100"/>
+          </a:xfrm>
+          <a:prstGeom prst="rect">
+            <a:avLst/>
+          </a:prstGeom>
+          <a:noFill/>
+          <a:ln w="12700">
+            <a:solidFill>
+              <a:prstClr val="black"/>
+            </a:solidFill>
+          </a:ln>
+        </p:spPr>
+        <p:txBody>
+          <a:bodyPr vert="horz" lIns="91440" tIns="45720" rIns="91440" bIns="45720" rtlCol="0" anchor="ctr"/>
+          <a:lstStyle/>
+          <a:p>
+            <a:endParaRPr lang="ja-JP" altLang="en-US"/>
+          </a:p>
+        </p:txBody>
+      </p:sp>
+      <p:sp>
+        <p:nvSpPr>
+          <p:cNvPr id="5" name="Notes Placeholder 4"/>
+          <p:cNvSpPr>
+            <a:spLocks noGrp="1"/>
+          </p:cNvSpPr>
+          <p:nvPr>
+            <p:ph type="body" sz="quarter" idx="3"/>
+          </p:nvPr>
+        </p:nvSpPr>
+        <p:spPr>
+          <a:xfrm>
+            <a:off x="685800" y="4400550"/>
+            <a:ext cx="5486400" cy="3600450"/>
+          </a:xfrm>
+          <a:prstGeom prst="rect">
+            <a:avLst/>
+          </a:prstGeom>
+        </p:spPr>
+        <p:txBody>
+          <a:bodyPr vert="horz" lIns="91440" tIns="45720" rIns="91440" bIns="45720" rtlCol="0"/>
+          <a:lstStyle/>
+          <a:p>
+            <a:pPr lvl="0"/>
+            <a:r>
+              <a:rPr kumimoji="1" lang="en-US" altLang="ja-JP"/>
+              <a:t>Click to edit Master text styles</a:t>
+            </a:r>
+          </a:p>
+          <a:p>
+            <a:pPr lvl="1"/>
+            <a:r>
+              <a:rPr kumimoji="1" lang="en-US" altLang="ja-JP"/>
+              <a:t>Second level</a:t>
+            </a:r>
+          </a:p>
+          <a:p>
+            <a:pPr lvl="2"/>
+            <a:r>
+              <a:rPr kumimoji="1" lang="en-US" altLang="ja-JP"/>
+              <a:t>Third level</a:t>
+            </a:r>
+          </a:p>
+          <a:p>
+            <a:pPr lvl="3"/>
+            <a:r>
+              <a:rPr kumimoji="1" lang="en-US" altLang="ja-JP"/>
+              <a:t>Fourth level</a:t>
+            </a:r>
+          </a:p>
+          <a:p>
+            <a:pPr lvl="4"/>
+            <a:r>
+              <a:rPr kumimoji="1" lang="en-US" altLang="ja-JP"/>
+              <a:t>Fifth level</a:t>
+            </a:r>
+            <a:endParaRPr kumimoji="1" lang="ja-JP" altLang="en-US"/>
+          </a:p>
+        </p:txBody>
+      </p:sp>
+      <p:sp>
+        <p:nvSpPr>
+          <p:cNvPr id="6" name="Footer Placeholder 5"/>
+          <p:cNvSpPr>
+            <a:spLocks noGrp="1"/>
+          </p:cNvSpPr>
+          <p:nvPr>
+            <p:ph type="ftr" sz="quarter" idx="4"/>
+          </p:nvPr>
+        </p:nvSpPr>
+        <p:spPr>
+          <a:xfrm>
+            <a:off x="0" y="8685213"/>
+            <a:ext cx="2971800" cy="458787"/>
+          </a:xfrm>
+          <a:prstGeom prst="rect">
+            <a:avLst/>
+          </a:prstGeom>
+        </p:spPr>
+        <p:txBody>
+          <a:bodyPr vert="horz" lIns="91440" tIns="45720" rIns="91440" bIns="45720" rtlCol="0" anchor="b"/>
+          <a:lstStyle>
+            <a:lvl1pPr algn="l">
+              <a:defRPr sz="1200"/>
+            </a:lvl1pPr>
+          </a:lstStyle>
+          <a:p>
+            <a:endParaRPr kumimoji="1" lang="ja-JP" altLang="en-US"/>
+          </a:p>
+        </p:txBody>
+      </p:sp>
+      <p:sp>
+        <p:nvSpPr>
+          <p:cNvPr id="7" name="Slide Number Placeholder 6"/>
+          <p:cNvSpPr>
+            <a:spLocks noGrp="1"/>
+          </p:cNvSpPr>
+          <p:nvPr>
+            <p:ph type="sldNum" sz="quarter" idx="5"/>
+          </p:nvPr>
+        </p:nvSpPr>
+        <p:spPr>
+          <a:xfrm>
+            <a:off x="3884613" y="8685213"/>
+            <a:ext cx="2971800" cy="458787"/>
+          </a:xfrm>
+          <a:prstGeom prst="rect">
+            <a:avLst/>
+          </a:prstGeom>
+        </p:spPr>
+        <p:txBody>
+          <a:bodyPr vert="horz" lIns="91440" tIns="45720" rIns="91440" bIns="45720" rtlCol="0" anchor="b"/>
+          <a:lstStyle>
+            <a:lvl1pPr algn="r">
+              <a:defRPr sz="1200"/>
+            </a:lvl1pPr>
+          </a:lstStyle>
+          <a:p>
+            <a:fld id="{FEC09E0F-CB96-48BC-BF39-0655988115D8}" type="slidenum">
+              <a:rPr kumimoji="1" lang="ja-JP" altLang="en-US" smtClean="0"/>
+              <a:t>‹#›</a:t>
+            </a:fld>
+            <a:endParaRPr kumimoji="1" lang="ja-JP" altLang="en-US"/>
+          </a:p>
+        </p:txBody>
+      </p:sp>
+    </p:spTree>
+    <p:extLst>
+      <p:ext uri="{BB962C8B-B14F-4D97-AF65-F5344CB8AC3E}">
+        <p14:creationId xmlns:p14="http://schemas.microsoft.com/office/powerpoint/2010/main" val="3067891243"/>
+      </p:ext>
+    </p:extLst>
+  </p:cSld>
+  <p:clrMap bg1="lt1" tx1="dk1" bg2="lt2" tx2="dk2" accent1="accent1" accent2="accent2" accent3="accent3" accent4="accent4" accent5="accent5" accent6="accent6" hlink="hlink" folHlink="folHlink"/>
+  <p:notesStyle>
+    <a:lvl1pPr marL="0" algn="l" defTabSz="914400" rtl="0" eaLnBrk="1" latinLnBrk="0" hangingPunct="1">
+      <a:defRPr kumimoji="1" sz="1200" kern="1200">
+        <a:solidFill>
+          <a:schemeClr val="tx1"/>
+        </a:solidFill>
+        <a:latin typeface="+mn-lt"/>
+        <a:ea typeface="+mn-ea"/>
+        <a:cs typeface="+mn-cs"/>
+      </a:defRPr>
+    </a:lvl1pPr>
+    <a:lvl2pPr marL="457200" algn="l" defTabSz="914400" rtl="0" eaLnBrk="1" latinLnBrk="0" hangingPunct="1">
+      <a:defRPr kumimoji="1" sz="1200" kern="1200">
+        <a:solidFill>
+          <a:schemeClr val="tx1"/>
+        </a:solidFill>
+        <a:latin typeface="+mn-lt"/>
+        <a:ea typeface="+mn-ea"/>
+        <a:cs typeface="+mn-cs"/>
+      </a:defRPr>
+    </a:lvl2pPr>
+    <a:lvl3pPr marL="914400" algn="l" defTabSz="914400" rtl="0" eaLnBrk="1" latinLnBrk="0" hangingPunct="1">
+      <a:defRPr kumimoji="1" sz="1200" kern="1200">
+        <a:solidFill>
+          <a:schemeClr val="tx1"/>
+        </a:solidFill>
+        <a:latin typeface="+mn-lt"/>
+        <a:ea typeface="+mn-ea"/>
+        <a:cs typeface="+mn-cs"/>
+      </a:defRPr>
+    </a:lvl3pPr>
+    <a:lvl4pPr marL="1371600" algn="l" defTabSz="914400" rtl="0" eaLnBrk="1" latinLnBrk="0" hangingPunct="1">
+      <a:defRPr kumimoji="1" sz="1200" kern="1200">
+        <a:solidFill>
+          <a:schemeClr val="tx1"/>
+        </a:solidFill>
+        <a:latin typeface="+mn-lt"/>
+        <a:ea typeface="+mn-ea"/>
+        <a:cs typeface="+mn-cs"/>
+      </a:defRPr>
+    </a:lvl4pPr>
+    <a:lvl5pPr marL="1828800" algn="l" defTabSz="914400" rtl="0" eaLnBrk="1" latinLnBrk="0" hangingPunct="1">
+      <a:defRPr kumimoji="1" sz="1200" kern="1200">
+        <a:solidFill>
+          <a:schemeClr val="tx1"/>
+        </a:solidFill>
+        <a:latin typeface="+mn-lt"/>
+        <a:ea typeface="+mn-ea"/>
+        <a:cs typeface="+mn-cs"/>
+      </a:defRPr>
+    </a:lvl5pPr>
+    <a:lvl6pPr marL="2286000" algn="l" defTabSz="914400" rtl="0" eaLnBrk="1" latinLnBrk="0" hangingPunct="1">
+      <a:defRPr kumimoji="1" sz="1200" kern="1200">
+        <a:solidFill>
+          <a:schemeClr val="tx1"/>
+        </a:solidFill>
+        <a:latin typeface="+mn-lt"/>
+        <a:ea typeface="+mn-ea"/>
+        <a:cs typeface="+mn-cs"/>
+      </a:defRPr>
+    </a:lvl6pPr>
+    <a:lvl7pPr marL="2743200" algn="l" defTabSz="914400" rtl="0" eaLnBrk="1" latinLnBrk="0" hangingPunct="1">
+      <a:defRPr kumimoji="1" sz="1200" kern="1200">
+        <a:solidFill>
+          <a:schemeClr val="tx1"/>
+        </a:solidFill>
+        <a:latin typeface="+mn-lt"/>
+        <a:ea typeface="+mn-ea"/>
+        <a:cs typeface="+mn-cs"/>
+      </a:defRPr>
+    </a:lvl7pPr>
+    <a:lvl8pPr marL="3200400" algn="l" defTabSz="914400" rtl="0" eaLnBrk="1" latinLnBrk="0" hangingPunct="1">
+      <a:defRPr kumimoji="1" sz="1200" kern="1200">
+        <a:solidFill>
+          <a:schemeClr val="tx1"/>
+        </a:solidFill>
+        <a:latin typeface="+mn-lt"/>
+        <a:ea typeface="+mn-ea"/>
+        <a:cs typeface="+mn-cs"/>
+      </a:defRPr>
+    </a:lvl8pPr>
+    <a:lvl9pPr marL="3657600" algn="l" defTabSz="914400" rtl="0" eaLnBrk="1" latinLnBrk="0" hangingPunct="1">
+      <a:defRPr kumimoji="1" sz="1200" kern="1200">
+        <a:solidFill>
+          <a:schemeClr val="tx1"/>
+        </a:solidFill>
+        <a:latin typeface="+mn-lt"/>
+        <a:ea typeface="+mn-ea"/>
+        <a:cs typeface="+mn-cs"/>
+      </a:defRPr>
+    </a:lvl9pPr>
+  </p:notesStyle>
+</p:notesMaster>
+</file>
+
+<file path=ppt/notesSlides/notesSlide1.xml><?xml version="1.0" encoding="utf-8"?>
+<p:notes xmlns:a="http://schemas.openxmlformats.org/drawingml/2006/main" xmlns:r="http://schemas.openxmlformats.org/officeDocument/2006/relationships" xmlns:p="http://schemas.openxmlformats.org/presentationml/2006/main">
+  <p:cSld>
+    <p:spTree>
+      <p:nvGrpSpPr>
+        <p:cNvPr id="1" name=""/>
+        <p:cNvGrpSpPr/>
+        <p:nvPr/>
+      </p:nvGrpSpPr>
+      <p:grpSpPr>
+        <a:xfrm>
+          <a:off x="0" y="0"/>
+          <a:ext cx="0" cy="0"/>
+          <a:chOff x="0" y="0"/>
+          <a:chExt cx="0" cy="0"/>
+        </a:xfrm>
+      </p:grpSpPr>
+      <p:sp>
+        <p:nvSpPr>
+          <p:cNvPr id="2" name="Slide Image Placeholder 1"/>
+          <p:cNvSpPr>
+            <a:spLocks noGrp="1" noRot="1" noChangeAspect="1"/>
+          </p:cNvSpPr>
+          <p:nvPr>
+            <p:ph type="sldImg"/>
+          </p:nvPr>
+        </p:nvSpPr>
+        <p:spPr/>
+      </p:sp>
+      <p:sp>
+        <p:nvSpPr>
+          <p:cNvPr id="3" name="Notes Placeholder 2"/>
+          <p:cNvSpPr>
+            <a:spLocks noGrp="1"/>
+          </p:cNvSpPr>
+          <p:nvPr>
+            <p:ph type="body" idx="1"/>
+          </p:nvPr>
+        </p:nvSpPr>
+        <p:spPr/>
+        <p:txBody>
+          <a:bodyPr/>
+          <a:lstStyle/>
+          <a:p>
+            <a:endParaRPr kumimoji="1" lang="ja-JP" altLang="en-US" dirty="0"/>
+          </a:p>
+        </p:txBody>
+      </p:sp>
+      <p:sp>
+        <p:nvSpPr>
+          <p:cNvPr id="4" name="Slide Number Placeholder 3"/>
+          <p:cNvSpPr>
+            <a:spLocks noGrp="1"/>
+          </p:cNvSpPr>
+          <p:nvPr>
+            <p:ph type="sldNum" sz="quarter" idx="5"/>
+          </p:nvPr>
+        </p:nvSpPr>
+        <p:spPr/>
+        <p:txBody>
+          <a:bodyPr/>
+          <a:lstStyle/>
+          <a:p>
+            <a:fld id="{FEC09E0F-CB96-48BC-BF39-0655988115D8}" type="slidenum">
+              <a:rPr kumimoji="1" lang="ja-JP" altLang="en-US" smtClean="0"/>
+              <a:t>8</a:t>
+            </a:fld>
+            <a:endParaRPr kumimoji="1" lang="ja-JP" altLang="en-US"/>
+          </a:p>
+        </p:txBody>
+      </p:sp>
+    </p:spTree>
+    <p:extLst>
+      <p:ext uri="{BB962C8B-B14F-4D97-AF65-F5344CB8AC3E}">
+        <p14:creationId xmlns:p14="http://schemas.microsoft.com/office/powerpoint/2010/main" val="1923871603"/>
+      </p:ext>
+    </p:extLst>
+  </p:cSld>
+  <p:clrMapOvr>
+    <a:masterClrMapping/>
+  </p:clrMapOvr>
+</p:notes>
+</file>
+
 <file path=ppt/slideLayouts/slideLayout1.xml><?xml version="1.0" encoding="utf-8"?>
 <p:sldLayout xmlns:a="http://schemas.openxmlformats.org/drawingml/2006/main" xmlns:r="http://schemas.openxmlformats.org/officeDocument/2006/relationships" xmlns:p="http://schemas.openxmlformats.org/presentationml/2006/main" type="title" preserve="1">
   <p:cSld name="タイトル スライド">
@@ -264,7 +703,7 @@
           <a:p>
             <a:fld id="{D6A4CCDA-1C04-4108-8746-E3F195C3A5BB}" type="datetimeFigureOut">
               <a:rPr kumimoji="1" lang="ja-JP" altLang="en-US" smtClean="0"/>
-              <a:t>2024/6/13</a:t>
+              <a:t>2025/11/6</a:t>
             </a:fld>
             <a:endParaRPr kumimoji="1" lang="ja-JP" altLang="en-US"/>
           </a:p>
@@ -494,7 +933,7 @@
           <a:p>
             <a:fld id="{D6A4CCDA-1C04-4108-8746-E3F195C3A5BB}" type="datetimeFigureOut">
               <a:rPr kumimoji="1" lang="ja-JP" altLang="en-US" smtClean="0"/>
-              <a:t>2024/6/13</a:t>
+              <a:t>2025/11/6</a:t>
             </a:fld>
             <a:endParaRPr kumimoji="1" lang="ja-JP" altLang="en-US"/>
           </a:p>
@@ -734,7 +1173,7 @@
           <a:p>
             <a:fld id="{D6A4CCDA-1C04-4108-8746-E3F195C3A5BB}" type="datetimeFigureOut">
               <a:rPr kumimoji="1" lang="ja-JP" altLang="en-US" smtClean="0"/>
-              <a:t>2024/6/13</a:t>
+              <a:t>2025/11/6</a:t>
             </a:fld>
             <a:endParaRPr kumimoji="1" lang="ja-JP" altLang="en-US"/>
           </a:p>
@@ -964,7 +1403,7 @@
           <a:p>
             <a:fld id="{D6A4CCDA-1C04-4108-8746-E3F195C3A5BB}" type="datetimeFigureOut">
               <a:rPr kumimoji="1" lang="ja-JP" altLang="en-US" smtClean="0"/>
-              <a:t>2024/6/13</a:t>
+              <a:t>2025/11/6</a:t>
             </a:fld>
             <a:endParaRPr kumimoji="1" lang="ja-JP" altLang="en-US"/>
           </a:p>
@@ -1239,7 +1678,7 @@
           <a:p>
             <a:fld id="{D6A4CCDA-1C04-4108-8746-E3F195C3A5BB}" type="datetimeFigureOut">
               <a:rPr kumimoji="1" lang="ja-JP" altLang="en-US" smtClean="0"/>
-              <a:t>2024/6/13</a:t>
+              <a:t>2025/11/6</a:t>
             </a:fld>
             <a:endParaRPr kumimoji="1" lang="ja-JP" altLang="en-US"/>
           </a:p>
@@ -1568,7 +2007,7 @@
           <a:p>
             <a:fld id="{D6A4CCDA-1C04-4108-8746-E3F195C3A5BB}" type="datetimeFigureOut">
               <a:rPr kumimoji="1" lang="ja-JP" altLang="en-US" smtClean="0"/>
-              <a:t>2024/6/13</a:t>
+              <a:t>2025/11/6</a:t>
             </a:fld>
             <a:endParaRPr kumimoji="1" lang="ja-JP" altLang="en-US"/>
           </a:p>
@@ -2044,7 +2483,7 @@
           <a:p>
             <a:fld id="{D6A4CCDA-1C04-4108-8746-E3F195C3A5BB}" type="datetimeFigureOut">
               <a:rPr kumimoji="1" lang="ja-JP" altLang="en-US" smtClean="0"/>
-              <a:t>2024/6/13</a:t>
+              <a:t>2025/11/6</a:t>
             </a:fld>
             <a:endParaRPr kumimoji="1" lang="ja-JP" altLang="en-US"/>
           </a:p>
@@ -2185,7 +2624,7 @@
           <a:p>
             <a:fld id="{D6A4CCDA-1C04-4108-8746-E3F195C3A5BB}" type="datetimeFigureOut">
               <a:rPr kumimoji="1" lang="ja-JP" altLang="en-US" smtClean="0"/>
-              <a:t>2024/6/13</a:t>
+              <a:t>2025/11/6</a:t>
             </a:fld>
             <a:endParaRPr kumimoji="1" lang="ja-JP" altLang="en-US"/>
           </a:p>
@@ -2298,7 +2737,7 @@
           <a:p>
             <a:fld id="{D6A4CCDA-1C04-4108-8746-E3F195C3A5BB}" type="datetimeFigureOut">
               <a:rPr kumimoji="1" lang="ja-JP" altLang="en-US" smtClean="0"/>
-              <a:t>2024/6/13</a:t>
+              <a:t>2025/11/6</a:t>
             </a:fld>
             <a:endParaRPr kumimoji="1" lang="ja-JP" altLang="en-US"/>
           </a:p>
@@ -2641,7 +3080,7 @@
           <a:p>
             <a:fld id="{D6A4CCDA-1C04-4108-8746-E3F195C3A5BB}" type="datetimeFigureOut">
               <a:rPr kumimoji="1" lang="ja-JP" altLang="en-US" smtClean="0"/>
-              <a:t>2024/6/13</a:t>
+              <a:t>2025/11/6</a:t>
             </a:fld>
             <a:endParaRPr kumimoji="1" lang="ja-JP" altLang="en-US"/>
           </a:p>
@@ -2929,7 +3368,7 @@
           <a:p>
             <a:fld id="{D6A4CCDA-1C04-4108-8746-E3F195C3A5BB}" type="datetimeFigureOut">
               <a:rPr kumimoji="1" lang="ja-JP" altLang="en-US" smtClean="0"/>
-              <a:t>2024/6/13</a:t>
+              <a:t>2025/11/6</a:t>
             </a:fld>
             <a:endParaRPr kumimoji="1" lang="ja-JP" altLang="en-US"/>
           </a:p>
@@ -3202,7 +3641,7 @@
           <a:p>
             <a:fld id="{D6A4CCDA-1C04-4108-8746-E3F195C3A5BB}" type="datetimeFigureOut">
               <a:rPr kumimoji="1" lang="ja-JP" altLang="en-US" smtClean="0"/>
-              <a:t>2024/6/13</a:t>
+              <a:t>2025/11/6</a:t>
             </a:fld>
             <a:endParaRPr kumimoji="1" lang="ja-JP" altLang="en-US"/>
           </a:p>
@@ -5339,7 +5778,13 @@
     </p:bg>
     <p:spTree>
       <p:nvGrpSpPr>
-        <p:cNvPr id="1" name=""/>
+        <p:cNvPr id="1" name="">
+          <a:extLst>
+            <a:ext uri="{FF2B5EF4-FFF2-40B4-BE49-F238E27FC236}">
+              <a16:creationId xmlns:a16="http://schemas.microsoft.com/office/drawing/2014/main" id="{2C90736C-69DA-6AD4-96D2-F4FB9AC7A609}"/>
+            </a:ext>
+          </a:extLst>
+        </p:cNvPr>
         <p:cNvGrpSpPr/>
         <p:nvPr/>
       </p:nvGrpSpPr>
@@ -5353,10 +5798,10 @@
       </p:grpSpPr>
       <p:sp>
         <p:nvSpPr>
-          <p:cNvPr id="2" name="正方形/長方形 1">
-            <a:extLst>
-              <a:ext uri="{FF2B5EF4-FFF2-40B4-BE49-F238E27FC236}">
-                <a16:creationId xmlns:a16="http://schemas.microsoft.com/office/drawing/2014/main" id="{BBEBA10E-FD32-997D-0F16-E6BC86232326}"/>
+          <p:cNvPr id="4" name="正方形/長方形 3">
+            <a:extLst>
+              <a:ext uri="{FF2B5EF4-FFF2-40B4-BE49-F238E27FC236}">
+                <a16:creationId xmlns:a16="http://schemas.microsoft.com/office/drawing/2014/main" id="{26B1CFA1-C584-63C6-A13F-7C4ACA4450F0}"/>
               </a:ext>
             </a:extLst>
           </p:cNvPr>
@@ -5365,7 +5810,7 @@
         </p:nvSpPr>
         <p:spPr>
           <a:xfrm>
-            <a:off x="6123618" y="2895599"/>
+            <a:off x="3210881" y="2702559"/>
             <a:ext cx="5784525" cy="2885183"/>
           </a:xfrm>
           <a:prstGeom prst="rect">
@@ -5405,10 +5850,10 @@
       </p:sp>
       <p:sp>
         <p:nvSpPr>
-          <p:cNvPr id="7" name="正方形/長方形 6">
-            <a:extLst>
-              <a:ext uri="{FF2B5EF4-FFF2-40B4-BE49-F238E27FC236}">
-                <a16:creationId xmlns:a16="http://schemas.microsoft.com/office/drawing/2014/main" id="{06FB6F7C-B702-1038-6DFF-F0FD2C982FD9}"/>
+          <p:cNvPr id="6" name="正方形/長方形 5">
+            <a:extLst>
+              <a:ext uri="{FF2B5EF4-FFF2-40B4-BE49-F238E27FC236}">
+                <a16:creationId xmlns:a16="http://schemas.microsoft.com/office/drawing/2014/main" id="{980C0DBA-5625-6A49-9ACD-2CA14DAC0161}"/>
               </a:ext>
             </a:extLst>
           </p:cNvPr>
@@ -5417,7 +5862,7 @@
         </p:nvSpPr>
         <p:spPr>
           <a:xfrm>
-            <a:off x="6113231" y="737051"/>
+            <a:off x="3200494" y="544011"/>
             <a:ext cx="5784526" cy="2158548"/>
           </a:xfrm>
           <a:prstGeom prst="rect">
@@ -5455,12 +5900,57 @@
           </a:p>
         </p:txBody>
       </p:sp>
+      <p:pic>
+        <p:nvPicPr>
+          <p:cNvPr id="1026" name="Picture 2">
+            <a:extLst>
+              <a:ext uri="{FF2B5EF4-FFF2-40B4-BE49-F238E27FC236}">
+                <a16:creationId xmlns:a16="http://schemas.microsoft.com/office/drawing/2014/main" id="{47C5F4E3-95E7-71DC-8690-3FC92514335C}"/>
+              </a:ext>
+            </a:extLst>
+          </p:cNvPr>
+          <p:cNvPicPr>
+            <a:picLocks noChangeAspect="1" noChangeArrowheads="1"/>
+          </p:cNvPicPr>
+          <p:nvPr/>
+        </p:nvPicPr>
+        <p:blipFill rotWithShape="1">
+          <a:blip r:embed="rId2">
+            <a:extLst>
+              <a:ext uri="{28A0092B-C50C-407E-A947-70E740481C1C}">
+                <a14:useLocalDpi xmlns:a14="http://schemas.microsoft.com/office/drawing/2010/main" val="0"/>
+              </a:ext>
+            </a:extLst>
+          </a:blip>
+          <a:srcRect r="50873"/>
+          <a:stretch/>
+        </p:blipFill>
+        <p:spPr bwMode="auto">
+          <a:xfrm>
+            <a:off x="303195" y="1418404"/>
+            <a:ext cx="1946602" cy="3429000"/>
+          </a:xfrm>
+          <a:prstGeom prst="rect">
+            <a:avLst/>
+          </a:prstGeom>
+          <a:noFill/>
+          <a:extLst>
+            <a:ext uri="{909E8E84-426E-40DD-AFC4-6F175D3DCCD1}">
+              <a14:hiddenFill xmlns:a14="http://schemas.microsoft.com/office/drawing/2010/main">
+                <a:solidFill>
+                  <a:srgbClr val="FFFFFF"/>
+                </a:solidFill>
+              </a14:hiddenFill>
+            </a:ext>
+          </a:extLst>
+        </p:spPr>
+      </p:pic>
       <p:cxnSp>
         <p:nvCxnSpPr>
-          <p:cNvPr id="18" name="直線コネクタ 17">
-            <a:extLst>
-              <a:ext uri="{FF2B5EF4-FFF2-40B4-BE49-F238E27FC236}">
-                <a16:creationId xmlns:a16="http://schemas.microsoft.com/office/drawing/2014/main" id="{1ED74575-413E-8807-67C9-0C9DE6A4A37B}"/>
+          <p:cNvPr id="8" name="直線コネクタ 7">
+            <a:extLst>
+              <a:ext uri="{FF2B5EF4-FFF2-40B4-BE49-F238E27FC236}">
+                <a16:creationId xmlns:a16="http://schemas.microsoft.com/office/drawing/2014/main" id="{96EA1208-F06C-7BE7-C34F-F2DBCFF1ABDD}"/>
               </a:ext>
             </a:extLst>
           </p:cNvPr>
@@ -5471,7 +5961,7 @@
         </p:nvCxnSpPr>
         <p:spPr>
           <a:xfrm>
-            <a:off x="7572285" y="3093590"/>
+            <a:off x="4659548" y="2900550"/>
             <a:ext cx="0" cy="2819530"/>
           </a:xfrm>
           <a:prstGeom prst="line">
@@ -5504,10 +5994,10 @@
       </p:cxnSp>
       <p:cxnSp>
         <p:nvCxnSpPr>
-          <p:cNvPr id="20" name="直線コネクタ 19">
-            <a:extLst>
-              <a:ext uri="{FF2B5EF4-FFF2-40B4-BE49-F238E27FC236}">
-                <a16:creationId xmlns:a16="http://schemas.microsoft.com/office/drawing/2014/main" id="{1C964DFC-012E-C826-4875-430AF03CB9D9}"/>
+          <p:cNvPr id="9" name="直線コネクタ 8">
+            <a:extLst>
+              <a:ext uri="{FF2B5EF4-FFF2-40B4-BE49-F238E27FC236}">
+                <a16:creationId xmlns:a16="http://schemas.microsoft.com/office/drawing/2014/main" id="{0B6DAD63-15BD-0255-609F-E486F0BF1930}"/>
               </a:ext>
             </a:extLst>
           </p:cNvPr>
@@ -5518,7 +6008,7 @@
         </p:nvCxnSpPr>
         <p:spPr>
           <a:xfrm>
-            <a:off x="9005494" y="3087915"/>
+            <a:off x="6092757" y="2894875"/>
             <a:ext cx="3243" cy="2825205"/>
           </a:xfrm>
           <a:prstGeom prst="line">
@@ -5551,10 +6041,10 @@
       </p:cxnSp>
       <p:cxnSp>
         <p:nvCxnSpPr>
-          <p:cNvPr id="21" name="直線コネクタ 20">
-            <a:extLst>
-              <a:ext uri="{FF2B5EF4-FFF2-40B4-BE49-F238E27FC236}">
-                <a16:creationId xmlns:a16="http://schemas.microsoft.com/office/drawing/2014/main" id="{5E8CBAA7-8CE0-6CF3-A272-78D7E25BB4D3}"/>
+          <p:cNvPr id="10" name="直線コネクタ 9">
+            <a:extLst>
+              <a:ext uri="{FF2B5EF4-FFF2-40B4-BE49-F238E27FC236}">
+                <a16:creationId xmlns:a16="http://schemas.microsoft.com/office/drawing/2014/main" id="{DD0A9A3D-DAC2-B823-D296-51EDF19718BD}"/>
               </a:ext>
             </a:extLst>
           </p:cNvPr>
@@ -5565,7 +6055,7 @@
         </p:nvCxnSpPr>
         <p:spPr>
           <a:xfrm>
-            <a:off x="10461400" y="3087914"/>
+            <a:off x="7548663" y="2894874"/>
             <a:ext cx="0" cy="2825206"/>
           </a:xfrm>
           <a:prstGeom prst="line">
@@ -5598,10 +6088,10 @@
       </p:cxnSp>
       <p:cxnSp>
         <p:nvCxnSpPr>
-          <p:cNvPr id="22" name="直線コネクタ 21">
-            <a:extLst>
-              <a:ext uri="{FF2B5EF4-FFF2-40B4-BE49-F238E27FC236}">
-                <a16:creationId xmlns:a16="http://schemas.microsoft.com/office/drawing/2014/main" id="{B8D16889-A2A6-4893-0F0B-CA5B5598ACFE}"/>
+          <p:cNvPr id="11" name="直線コネクタ 10">
+            <a:extLst>
+              <a:ext uri="{FF2B5EF4-FFF2-40B4-BE49-F238E27FC236}">
+                <a16:creationId xmlns:a16="http://schemas.microsoft.com/office/drawing/2014/main" id="{FEF07995-28A0-F882-4AC7-2E8913D685A8}"/>
               </a:ext>
             </a:extLst>
           </p:cNvPr>
@@ -5612,7 +6102,7 @@
         </p:nvCxnSpPr>
         <p:spPr>
           <a:xfrm>
-            <a:off x="11878396" y="680720"/>
+            <a:off x="8965659" y="487680"/>
             <a:ext cx="0" cy="5100062"/>
           </a:xfrm>
           <a:prstGeom prst="line">
@@ -5644,10 +6134,10 @@
       </p:cxnSp>
       <p:cxnSp>
         <p:nvCxnSpPr>
-          <p:cNvPr id="24" name="直線コネクタ 23">
-            <a:extLst>
-              <a:ext uri="{FF2B5EF4-FFF2-40B4-BE49-F238E27FC236}">
-                <a16:creationId xmlns:a16="http://schemas.microsoft.com/office/drawing/2014/main" id="{0CC613F5-8F8A-56C6-FB3E-FD9FD05867C0}"/>
+          <p:cNvPr id="12" name="直線コネクタ 11">
+            <a:extLst>
+              <a:ext uri="{FF2B5EF4-FFF2-40B4-BE49-F238E27FC236}">
+                <a16:creationId xmlns:a16="http://schemas.microsoft.com/office/drawing/2014/main" id="{A3D48F80-4BA3-672C-3BCA-22B03CC66DD5}"/>
               </a:ext>
             </a:extLst>
           </p:cNvPr>
@@ -5658,7 +6148,7 @@
         </p:nvCxnSpPr>
         <p:spPr>
           <a:xfrm>
-            <a:off x="6013935" y="4328464"/>
+            <a:off x="3101198" y="4135424"/>
             <a:ext cx="6040123" cy="0"/>
           </a:xfrm>
           <a:prstGeom prst="line">
@@ -5691,10 +6181,10 @@
       </p:cxnSp>
       <p:sp>
         <p:nvSpPr>
-          <p:cNvPr id="25" name="正方形/長方形 24">
-            <a:extLst>
-              <a:ext uri="{FF2B5EF4-FFF2-40B4-BE49-F238E27FC236}">
-                <a16:creationId xmlns:a16="http://schemas.microsoft.com/office/drawing/2014/main" id="{DBFB5C14-81D1-7096-A7A6-6D99A00160CA}"/>
+          <p:cNvPr id="16" name="正方形/長方形 15">
+            <a:extLst>
+              <a:ext uri="{FF2B5EF4-FFF2-40B4-BE49-F238E27FC236}">
+                <a16:creationId xmlns:a16="http://schemas.microsoft.com/office/drawing/2014/main" id="{1702FDCD-E82B-37CB-B603-1F2FD10161DA}"/>
               </a:ext>
             </a:extLst>
           </p:cNvPr>
@@ -5703,7 +6193,7 @@
         </p:nvSpPr>
         <p:spPr>
           <a:xfrm>
-            <a:off x="7497934" y="1029619"/>
+            <a:off x="4585197" y="836579"/>
             <a:ext cx="148702" cy="1568992"/>
           </a:xfrm>
           <a:prstGeom prst="rect">
@@ -5752,10 +6242,10 @@
       </p:sp>
       <p:sp>
         <p:nvSpPr>
-          <p:cNvPr id="26" name="正方形/長方形 25">
-            <a:extLst>
-              <a:ext uri="{FF2B5EF4-FFF2-40B4-BE49-F238E27FC236}">
-                <a16:creationId xmlns:a16="http://schemas.microsoft.com/office/drawing/2014/main" id="{BEBC149C-70CB-B2D3-08ED-13A9B6D49598}"/>
+          <p:cNvPr id="17" name="正方形/長方形 16">
+            <a:extLst>
+              <a:ext uri="{FF2B5EF4-FFF2-40B4-BE49-F238E27FC236}">
+                <a16:creationId xmlns:a16="http://schemas.microsoft.com/office/drawing/2014/main" id="{1C074F32-FABC-78BF-9026-13B9E50FF88E}"/>
               </a:ext>
             </a:extLst>
           </p:cNvPr>
@@ -5764,7 +6254,7 @@
         </p:nvSpPr>
         <p:spPr>
           <a:xfrm>
-            <a:off x="10370835" y="1029618"/>
+            <a:off x="7458098" y="836578"/>
             <a:ext cx="148702" cy="1593145"/>
           </a:xfrm>
           <a:prstGeom prst="rect">
@@ -5813,10 +6303,10 @@
       </p:sp>
       <p:pic>
         <p:nvPicPr>
-          <p:cNvPr id="27" name="図 26">
-            <a:extLst>
-              <a:ext uri="{FF2B5EF4-FFF2-40B4-BE49-F238E27FC236}">
-                <a16:creationId xmlns:a16="http://schemas.microsoft.com/office/drawing/2014/main" id="{BBEA4A6C-87ED-7436-0D6F-E92D8D6C8184}"/>
+          <p:cNvPr id="23" name="図 22">
+            <a:extLst>
+              <a:ext uri="{FF2B5EF4-FFF2-40B4-BE49-F238E27FC236}">
+                <a16:creationId xmlns:a16="http://schemas.microsoft.com/office/drawing/2014/main" id="{8DDDEDA5-F8FA-2987-1DC0-D1940E9A7388}"/>
               </a:ext>
             </a:extLst>
           </p:cNvPr>
@@ -5826,11 +6316,83 @@
           <p:nvPr/>
         </p:nvPicPr>
         <p:blipFill>
-          <a:blip r:embed="rId2">
+          <a:blip r:embed="rId3">
+            <a:extLst>
+              <a:ext uri="{28A0092B-C50C-407E-A947-70E740481C1C}">
+                <a14:useLocalDpi xmlns:a14="http://schemas.microsoft.com/office/drawing/2010/main" val="0"/>
+              </a:ext>
+            </a:extLst>
+          </a:blip>
+          <a:stretch>
+            <a:fillRect/>
+          </a:stretch>
+        </p:blipFill>
+        <p:spPr>
+          <a:xfrm>
+            <a:off x="9728557" y="1260154"/>
+            <a:ext cx="2131494" cy="316499"/>
+          </a:xfrm>
+          <a:prstGeom prst="rect">
+            <a:avLst/>
+          </a:prstGeom>
+        </p:spPr>
+      </p:pic>
+      <p:pic>
+        <p:nvPicPr>
+          <p:cNvPr id="3" name="図 2">
+            <a:extLst>
+              <a:ext uri="{FF2B5EF4-FFF2-40B4-BE49-F238E27FC236}">
+                <a16:creationId xmlns:a16="http://schemas.microsoft.com/office/drawing/2014/main" id="{D009086D-95AD-96B2-8AC6-AD73CC59FC7C}"/>
+              </a:ext>
+            </a:extLst>
+          </p:cNvPr>
+          <p:cNvPicPr>
+            <a:picLocks noChangeAspect="1"/>
+          </p:cNvPicPr>
+          <p:nvPr/>
+        </p:nvPicPr>
+        <p:blipFill>
+          <a:blip r:embed="rId4">
+            <a:extLst>
+              <a:ext uri="{28A0092B-C50C-407E-A947-70E740481C1C}">
+                <a14:useLocalDpi xmlns:a14="http://schemas.microsoft.com/office/drawing/2010/main" val="0"/>
+              </a:ext>
+            </a:extLst>
+          </a:blip>
+          <a:stretch>
+            <a:fillRect/>
+          </a:stretch>
+        </p:blipFill>
+        <p:spPr>
+          <a:xfrm>
+            <a:off x="1073812" y="2562026"/>
+            <a:ext cx="1626544" cy="3253089"/>
+          </a:xfrm>
+          <a:prstGeom prst="rect">
+            <a:avLst/>
+          </a:prstGeom>
+        </p:spPr>
+      </p:pic>
+      <p:pic>
+        <p:nvPicPr>
+          <p:cNvPr id="13" name="図 12">
+            <a:extLst>
+              <a:ext uri="{FF2B5EF4-FFF2-40B4-BE49-F238E27FC236}">
+                <a16:creationId xmlns:a16="http://schemas.microsoft.com/office/drawing/2014/main" id="{D13655DD-7633-5246-E704-2315739723B0}"/>
+              </a:ext>
+            </a:extLst>
+          </p:cNvPr>
+          <p:cNvPicPr>
+            <a:picLocks noChangeAspect="1"/>
+          </p:cNvPicPr>
+          <p:nvPr/>
+        </p:nvPicPr>
+        <p:blipFill>
+          <a:blip r:embed="rId5">
             <a:extLst>
               <a:ext uri="{BEBA8EAE-BF5A-486C-A8C5-ECC9F3942E4B}">
                 <a14:imgProps xmlns:a14="http://schemas.microsoft.com/office/drawing/2010/main">
-                  <a14:imgLayer r:embed="rId3">
+                  <a14:imgLayer r:embed="rId6">
                     <a14:imgEffect>
                       <a14:sharpenSoften amount="48000"/>
                     </a14:imgEffect>
@@ -5851,7 +6413,7 @@
         </p:blipFill>
         <p:spPr>
           <a:xfrm>
-            <a:off x="6096000" y="680720"/>
+            <a:off x="3183263" y="487680"/>
             <a:ext cx="2915975" cy="1992735"/>
           </a:xfrm>
           <a:prstGeom prst="rect">
@@ -5861,10 +6423,10 @@
       </p:pic>
       <p:pic>
         <p:nvPicPr>
-          <p:cNvPr id="28" name="図 27">
-            <a:extLst>
-              <a:ext uri="{FF2B5EF4-FFF2-40B4-BE49-F238E27FC236}">
-                <a16:creationId xmlns:a16="http://schemas.microsoft.com/office/drawing/2014/main" id="{B01C1BA5-AF7D-483C-8418-F4FAE441EDB9}"/>
+          <p:cNvPr id="14" name="図 13">
+            <a:extLst>
+              <a:ext uri="{FF2B5EF4-FFF2-40B4-BE49-F238E27FC236}">
+                <a16:creationId xmlns:a16="http://schemas.microsoft.com/office/drawing/2014/main" id="{60989D3E-B3B8-B11E-0C3F-C2C53705A356}"/>
               </a:ext>
             </a:extLst>
           </p:cNvPr>
@@ -5874,11 +6436,11 @@
           <p:nvPr/>
         </p:nvPicPr>
         <p:blipFill>
-          <a:blip r:embed="rId2">
+          <a:blip r:embed="rId5">
             <a:extLst>
               <a:ext uri="{BEBA8EAE-BF5A-486C-A8C5-ECC9F3942E4B}">
                 <a14:imgProps xmlns:a14="http://schemas.microsoft.com/office/drawing/2010/main">
-                  <a14:imgLayer r:embed="rId3">
+                  <a14:imgLayer r:embed="rId6">
                     <a14:imgEffect>
                       <a14:sharpenSoften amount="48000"/>
                     </a14:imgEffect>
@@ -5899,7 +6461,7 @@
         </p:blipFill>
         <p:spPr>
           <a:xfrm flipH="1">
-            <a:off x="9003365" y="680719"/>
+            <a:off x="6090628" y="487679"/>
             <a:ext cx="2911623" cy="1992735"/>
           </a:xfrm>
           <a:prstGeom prst="rect">
@@ -5909,10 +6471,10 @@
       </p:pic>
       <p:sp>
         <p:nvSpPr>
-          <p:cNvPr id="29" name="正方形/長方形 28">
-            <a:extLst>
-              <a:ext uri="{FF2B5EF4-FFF2-40B4-BE49-F238E27FC236}">
-                <a16:creationId xmlns:a16="http://schemas.microsoft.com/office/drawing/2014/main" id="{516C9FE8-544D-6F76-254D-07E9ADC1266D}"/>
+          <p:cNvPr id="15" name="正方形/長方形 14">
+            <a:extLst>
+              <a:ext uri="{FF2B5EF4-FFF2-40B4-BE49-F238E27FC236}">
+                <a16:creationId xmlns:a16="http://schemas.microsoft.com/office/drawing/2014/main" id="{29993DE7-FCED-EFE5-374D-2D2FB84B571E}"/>
               </a:ext>
             </a:extLst>
           </p:cNvPr>
@@ -5921,7 +6483,7 @@
         </p:nvSpPr>
         <p:spPr>
           <a:xfrm>
-            <a:off x="6013935" y="3070735"/>
+            <a:off x="3101198" y="2877695"/>
             <a:ext cx="5964980" cy="81832"/>
           </a:xfrm>
           <a:prstGeom prst="rect">
@@ -5975,10 +6537,10 @@
       </p:sp>
       <p:sp>
         <p:nvSpPr>
-          <p:cNvPr id="1024" name="正方形/長方形 1023">
-            <a:extLst>
-              <a:ext uri="{FF2B5EF4-FFF2-40B4-BE49-F238E27FC236}">
-                <a16:creationId xmlns:a16="http://schemas.microsoft.com/office/drawing/2014/main" id="{1F89C9DD-E47E-8558-71E4-AE926E0B67D6}"/>
+          <p:cNvPr id="5" name="正方形/長方形 4">
+            <a:extLst>
+              <a:ext uri="{FF2B5EF4-FFF2-40B4-BE49-F238E27FC236}">
+                <a16:creationId xmlns:a16="http://schemas.microsoft.com/office/drawing/2014/main" id="{16D1E78A-F65C-6273-4419-EA514AFA556D}"/>
               </a:ext>
             </a:extLst>
           </p:cNvPr>
@@ -5987,16 +6549,16 @@
         </p:nvSpPr>
         <p:spPr>
           <a:xfrm>
-            <a:off x="340610" y="2894302"/>
-            <a:ext cx="5784525" cy="2885183"/>
+            <a:off x="3101199" y="2481712"/>
+            <a:ext cx="5964980" cy="395983"/>
           </a:xfrm>
           <a:prstGeom prst="rect">
             <a:avLst/>
           </a:prstGeom>
           <a:solidFill>
-            <a:srgbClr val="919FA1"/>
+            <a:srgbClr val="98999E"/>
           </a:solidFill>
-          <a:ln>
+          <a:ln w="31750">
             <a:noFill/>
           </a:ln>
         </p:spPr>
@@ -6025,12 +6587,59 @@
           </a:p>
         </p:txBody>
       </p:sp>
-      <p:sp>
-        <p:nvSpPr>
-          <p:cNvPr id="1025" name="正方形/長方形 1024">
-            <a:extLst>
-              <a:ext uri="{FF2B5EF4-FFF2-40B4-BE49-F238E27FC236}">
-                <a16:creationId xmlns:a16="http://schemas.microsoft.com/office/drawing/2014/main" id="{2229DB02-E67B-1CBA-03A1-228668565B3E}"/>
+      <p:pic>
+        <p:nvPicPr>
+          <p:cNvPr id="18" name="Picture 17">
+            <a:extLst>
+              <a:ext uri="{FF2B5EF4-FFF2-40B4-BE49-F238E27FC236}">
+                <a16:creationId xmlns:a16="http://schemas.microsoft.com/office/drawing/2014/main" id="{2BB480D6-D25A-1C66-6A89-C4592B3D6FE4}"/>
+              </a:ext>
+            </a:extLst>
+          </p:cNvPr>
+          <p:cNvPicPr>
+            <a:picLocks noChangeAspect="1"/>
+          </p:cNvPicPr>
+          <p:nvPr/>
+        </p:nvPicPr>
+        <p:blipFill>
+          <a:blip r:embed="rId7">
+            <a:extLst>
+              <a:ext uri="{BEBA8EAE-BF5A-486C-A8C5-ECC9F3942E4B}">
+                <a14:imgProps xmlns:a14="http://schemas.microsoft.com/office/drawing/2010/main">
+                  <a14:imgLayer r:embed="rId8">
+                    <a14:imgEffect>
+                      <a14:saturation sat="105000"/>
+                    </a14:imgEffect>
+                    <a14:imgEffect>
+                      <a14:brightnessContrast bright="15000" contrast="-10000"/>
+                    </a14:imgEffect>
+                  </a14:imgLayer>
+                </a14:imgProps>
+              </a:ext>
+              <a:ext uri="{28A0092B-C50C-407E-A947-70E740481C1C}">
+                <a14:useLocalDpi xmlns:a14="http://schemas.microsoft.com/office/drawing/2010/main" val="0"/>
+              </a:ext>
+            </a:extLst>
+          </a:blip>
+          <a:srcRect l="66913" t="16354" r="21663" b="78021"/>
+          <a:stretch/>
+        </p:blipFill>
+        <p:spPr>
+          <a:xfrm>
+            <a:off x="9862185" y="1495990"/>
+            <a:ext cx="557061" cy="274320"/>
+          </a:xfrm>
+          <a:prstGeom prst="rect">
+            <a:avLst/>
+          </a:prstGeom>
+        </p:spPr>
+      </p:pic>
+      <p:sp>
+        <p:nvSpPr>
+          <p:cNvPr id="22" name="Rectangle 21">
+            <a:extLst>
+              <a:ext uri="{FF2B5EF4-FFF2-40B4-BE49-F238E27FC236}">
+                <a16:creationId xmlns:a16="http://schemas.microsoft.com/office/drawing/2014/main" id="{DDEB79B7-385B-AF18-0CE9-3AE7F8660583}"/>
               </a:ext>
             </a:extLst>
           </p:cNvPr>
@@ -6039,15 +6648,94 @@
         </p:nvSpPr>
         <p:spPr>
           <a:xfrm>
-            <a:off x="330223" y="735754"/>
-            <a:ext cx="5784526" cy="2158548"/>
-          </a:xfrm>
-          <a:prstGeom prst="rect">
-            <a:avLst/>
-          </a:prstGeom>
-          <a:solidFill>
-            <a:srgbClr val="A5A7A6"/>
-          </a:solidFill>
+            <a:off x="3925569" y="1681480"/>
+            <a:ext cx="2672595" cy="132080"/>
+          </a:xfrm>
+          <a:custGeom>
+            <a:avLst/>
+            <a:gdLst>
+              <a:gd name="connsiteX0" fmla="*/ 0 w 2504227"/>
+              <a:gd name="connsiteY0" fmla="*/ 0 h 93980"/>
+              <a:gd name="connsiteX1" fmla="*/ 2504227 w 2504227"/>
+              <a:gd name="connsiteY1" fmla="*/ 0 h 93980"/>
+              <a:gd name="connsiteX2" fmla="*/ 2504227 w 2504227"/>
+              <a:gd name="connsiteY2" fmla="*/ 93980 h 93980"/>
+              <a:gd name="connsiteX3" fmla="*/ 0 w 2504227"/>
+              <a:gd name="connsiteY3" fmla="*/ 93980 h 93980"/>
+              <a:gd name="connsiteX4" fmla="*/ 0 w 2504227"/>
+              <a:gd name="connsiteY4" fmla="*/ 0 h 93980"/>
+              <a:gd name="connsiteX0" fmla="*/ 0 w 2516927"/>
+              <a:gd name="connsiteY0" fmla="*/ 43180 h 137160"/>
+              <a:gd name="connsiteX1" fmla="*/ 2516927 w 2516927"/>
+              <a:gd name="connsiteY1" fmla="*/ 0 h 137160"/>
+              <a:gd name="connsiteX2" fmla="*/ 2504227 w 2516927"/>
+              <a:gd name="connsiteY2" fmla="*/ 137160 h 137160"/>
+              <a:gd name="connsiteX3" fmla="*/ 0 w 2516927"/>
+              <a:gd name="connsiteY3" fmla="*/ 137160 h 137160"/>
+              <a:gd name="connsiteX4" fmla="*/ 0 w 2516927"/>
+              <a:gd name="connsiteY4" fmla="*/ 43180 h 137160"/>
+              <a:gd name="connsiteX0" fmla="*/ 0 w 2543597"/>
+              <a:gd name="connsiteY0" fmla="*/ 28958 h 137160"/>
+              <a:gd name="connsiteX1" fmla="*/ 2543597 w 2543597"/>
+              <a:gd name="connsiteY1" fmla="*/ 0 h 137160"/>
+              <a:gd name="connsiteX2" fmla="*/ 2530897 w 2543597"/>
+              <a:gd name="connsiteY2" fmla="*/ 137160 h 137160"/>
+              <a:gd name="connsiteX3" fmla="*/ 26670 w 2543597"/>
+              <a:gd name="connsiteY3" fmla="*/ 137160 h 137160"/>
+              <a:gd name="connsiteX4" fmla="*/ 0 w 2543597"/>
+              <a:gd name="connsiteY4" fmla="*/ 28958 h 137160"/>
+            </a:gdLst>
+            <a:ahLst/>
+            <a:cxnLst>
+              <a:cxn ang="0">
+                <a:pos x="connsiteX0" y="connsiteY0"/>
+              </a:cxn>
+              <a:cxn ang="0">
+                <a:pos x="connsiteX1" y="connsiteY1"/>
+              </a:cxn>
+              <a:cxn ang="0">
+                <a:pos x="connsiteX2" y="connsiteY2"/>
+              </a:cxn>
+              <a:cxn ang="0">
+                <a:pos x="connsiteX3" y="connsiteY3"/>
+              </a:cxn>
+              <a:cxn ang="0">
+                <a:pos x="connsiteX4" y="connsiteY4"/>
+              </a:cxn>
+            </a:cxnLst>
+            <a:rect l="l" t="t" r="r" b="b"/>
+            <a:pathLst>
+              <a:path w="2543597" h="137160">
+                <a:moveTo>
+                  <a:pt x="0" y="28958"/>
+                </a:moveTo>
+                <a:lnTo>
+                  <a:pt x="2543597" y="0"/>
+                </a:lnTo>
+                <a:lnTo>
+                  <a:pt x="2530897" y="137160"/>
+                </a:lnTo>
+                <a:lnTo>
+                  <a:pt x="26670" y="137160"/>
+                </a:lnTo>
+                <a:lnTo>
+                  <a:pt x="0" y="28958"/>
+                </a:lnTo>
+                <a:close/>
+              </a:path>
+            </a:pathLst>
+          </a:custGeom>
+          <a:gradFill>
+            <a:gsLst>
+              <a:gs pos="0">
+                <a:srgbClr val="827B6F"/>
+              </a:gs>
+              <a:gs pos="100000">
+                <a:srgbClr val="897F75"/>
+              </a:gs>
+            </a:gsLst>
+            <a:lin ang="0" scaled="0"/>
+          </a:gradFill>
           <a:ln>
             <a:noFill/>
           </a:ln>
@@ -6077,246 +6765,12 @@
           </a:p>
         </p:txBody>
       </p:sp>
-      <p:cxnSp>
-        <p:nvCxnSpPr>
-          <p:cNvPr id="1027" name="直線コネクタ 1026">
-            <a:extLst>
-              <a:ext uri="{FF2B5EF4-FFF2-40B4-BE49-F238E27FC236}">
-                <a16:creationId xmlns:a16="http://schemas.microsoft.com/office/drawing/2014/main" id="{B0E2A71F-764B-13D4-4603-BAA4882E2C86}"/>
-              </a:ext>
-            </a:extLst>
-          </p:cNvPr>
-          <p:cNvCxnSpPr>
-            <a:cxnSpLocks/>
-          </p:cNvCxnSpPr>
-          <p:nvPr/>
-        </p:nvCxnSpPr>
-        <p:spPr>
-          <a:xfrm>
-            <a:off x="1789277" y="3092293"/>
-            <a:ext cx="0" cy="2819530"/>
-          </a:xfrm>
-          <a:prstGeom prst="line">
-            <a:avLst/>
-          </a:prstGeom>
-          <a:ln w="25400">
-            <a:solidFill>
-              <a:schemeClr val="tx1">
-                <a:lumMod val="75000"/>
-                <a:lumOff val="25000"/>
-                <a:alpha val="90000"/>
-              </a:schemeClr>
-            </a:solidFill>
-          </a:ln>
-        </p:spPr>
-        <p:style>
-          <a:lnRef idx="1">
-            <a:schemeClr val="accent1"/>
-          </a:lnRef>
-          <a:fillRef idx="0">
-            <a:schemeClr val="accent1"/>
-          </a:fillRef>
-          <a:effectRef idx="0">
-            <a:schemeClr val="accent1"/>
-          </a:effectRef>
-          <a:fontRef idx="minor">
-            <a:schemeClr val="tx1"/>
-          </a:fontRef>
-        </p:style>
-      </p:cxnSp>
-      <p:cxnSp>
-        <p:nvCxnSpPr>
-          <p:cNvPr id="1028" name="直線コネクタ 1027">
-            <a:extLst>
-              <a:ext uri="{FF2B5EF4-FFF2-40B4-BE49-F238E27FC236}">
-                <a16:creationId xmlns:a16="http://schemas.microsoft.com/office/drawing/2014/main" id="{6D14FDCD-E28D-6683-9EEE-C44C9F31BBE9}"/>
-              </a:ext>
-            </a:extLst>
-          </p:cNvPr>
-          <p:cNvCxnSpPr>
-            <a:cxnSpLocks/>
-          </p:cNvCxnSpPr>
-          <p:nvPr/>
-        </p:nvCxnSpPr>
-        <p:spPr>
-          <a:xfrm>
-            <a:off x="3222486" y="3086618"/>
-            <a:ext cx="3243" cy="2825205"/>
-          </a:xfrm>
-          <a:prstGeom prst="line">
-            <a:avLst/>
-          </a:prstGeom>
-          <a:ln w="25400">
-            <a:solidFill>
-              <a:schemeClr val="tx1">
-                <a:lumMod val="85000"/>
-                <a:lumOff val="15000"/>
-                <a:alpha val="90000"/>
-              </a:schemeClr>
-            </a:solidFill>
-          </a:ln>
-        </p:spPr>
-        <p:style>
-          <a:lnRef idx="1">
-            <a:schemeClr val="accent1"/>
-          </a:lnRef>
-          <a:fillRef idx="0">
-            <a:schemeClr val="accent1"/>
-          </a:fillRef>
-          <a:effectRef idx="0">
-            <a:schemeClr val="accent1"/>
-          </a:effectRef>
-          <a:fontRef idx="minor">
-            <a:schemeClr val="tx1"/>
-          </a:fontRef>
-        </p:style>
-      </p:cxnSp>
-      <p:cxnSp>
-        <p:nvCxnSpPr>
-          <p:cNvPr id="1029" name="直線コネクタ 1028">
-            <a:extLst>
-              <a:ext uri="{FF2B5EF4-FFF2-40B4-BE49-F238E27FC236}">
-                <a16:creationId xmlns:a16="http://schemas.microsoft.com/office/drawing/2014/main" id="{B60F1D29-FDD9-A106-97A4-06A54682323B}"/>
-              </a:ext>
-            </a:extLst>
-          </p:cNvPr>
-          <p:cNvCxnSpPr>
-            <a:cxnSpLocks/>
-          </p:cNvCxnSpPr>
-          <p:nvPr/>
-        </p:nvCxnSpPr>
-        <p:spPr>
-          <a:xfrm>
-            <a:off x="4678392" y="3086617"/>
-            <a:ext cx="0" cy="2825206"/>
-          </a:xfrm>
-          <a:prstGeom prst="line">
-            <a:avLst/>
-          </a:prstGeom>
-          <a:ln w="25400">
-            <a:solidFill>
-              <a:schemeClr val="tx1">
-                <a:lumMod val="85000"/>
-                <a:lumOff val="15000"/>
-                <a:alpha val="90000"/>
-              </a:schemeClr>
-            </a:solidFill>
-          </a:ln>
-        </p:spPr>
-        <p:style>
-          <a:lnRef idx="1">
-            <a:schemeClr val="accent1"/>
-          </a:lnRef>
-          <a:fillRef idx="0">
-            <a:schemeClr val="accent1"/>
-          </a:fillRef>
-          <a:effectRef idx="0">
-            <a:schemeClr val="accent1"/>
-          </a:effectRef>
-          <a:fontRef idx="minor">
-            <a:schemeClr val="tx1"/>
-          </a:fontRef>
-        </p:style>
-      </p:cxnSp>
-      <p:cxnSp>
-        <p:nvCxnSpPr>
-          <p:cNvPr id="1030" name="直線コネクタ 1029">
-            <a:extLst>
-              <a:ext uri="{FF2B5EF4-FFF2-40B4-BE49-F238E27FC236}">
-                <a16:creationId xmlns:a16="http://schemas.microsoft.com/office/drawing/2014/main" id="{2F13C363-F614-C765-60E7-747568840C2A}"/>
-              </a:ext>
-            </a:extLst>
-          </p:cNvPr>
-          <p:cNvCxnSpPr>
-            <a:cxnSpLocks/>
-          </p:cNvCxnSpPr>
-          <p:nvPr/>
-        </p:nvCxnSpPr>
-        <p:spPr>
-          <a:xfrm>
-            <a:off x="6095388" y="679423"/>
-            <a:ext cx="0" cy="5100062"/>
-          </a:xfrm>
-          <a:prstGeom prst="line">
-            <a:avLst/>
-          </a:prstGeom>
-          <a:ln w="25400">
-            <a:solidFill>
-              <a:schemeClr val="tx1">
-                <a:lumMod val="85000"/>
-                <a:lumOff val="15000"/>
-              </a:schemeClr>
-            </a:solidFill>
-          </a:ln>
-        </p:spPr>
-        <p:style>
-          <a:lnRef idx="1">
-            <a:schemeClr val="accent1"/>
-          </a:lnRef>
-          <a:fillRef idx="0">
-            <a:schemeClr val="accent1"/>
-          </a:fillRef>
-          <a:effectRef idx="0">
-            <a:schemeClr val="accent1"/>
-          </a:effectRef>
-          <a:fontRef idx="minor">
-            <a:schemeClr val="tx1"/>
-          </a:fontRef>
-        </p:style>
-      </p:cxnSp>
-      <p:cxnSp>
-        <p:nvCxnSpPr>
-          <p:cNvPr id="1031" name="直線コネクタ 1030">
-            <a:extLst>
-              <a:ext uri="{FF2B5EF4-FFF2-40B4-BE49-F238E27FC236}">
-                <a16:creationId xmlns:a16="http://schemas.microsoft.com/office/drawing/2014/main" id="{06B12000-556C-9355-A48F-03CA1D16245F}"/>
-              </a:ext>
-            </a:extLst>
-          </p:cNvPr>
-          <p:cNvCxnSpPr>
-            <a:cxnSpLocks/>
-          </p:cNvCxnSpPr>
-          <p:nvPr/>
-        </p:nvCxnSpPr>
-        <p:spPr>
-          <a:xfrm>
-            <a:off x="230927" y="4327167"/>
-            <a:ext cx="6040123" cy="0"/>
-          </a:xfrm>
-          <a:prstGeom prst="line">
-            <a:avLst/>
-          </a:prstGeom>
-          <a:ln w="25400">
-            <a:solidFill>
-              <a:schemeClr val="tx1">
-                <a:lumMod val="85000"/>
-                <a:lumOff val="15000"/>
-                <a:alpha val="90000"/>
-              </a:schemeClr>
-            </a:solidFill>
-          </a:ln>
-        </p:spPr>
-        <p:style>
-          <a:lnRef idx="1">
-            <a:schemeClr val="accent1"/>
-          </a:lnRef>
-          <a:fillRef idx="0">
-            <a:schemeClr val="accent1"/>
-          </a:fillRef>
-          <a:effectRef idx="0">
-            <a:schemeClr val="accent1"/>
-          </a:effectRef>
-          <a:fontRef idx="minor">
-            <a:schemeClr val="tx1"/>
-          </a:fontRef>
-        </p:style>
-      </p:cxnSp>
-      <p:sp>
-        <p:nvSpPr>
-          <p:cNvPr id="1032" name="正方形/長方形 1031">
-            <a:extLst>
-              <a:ext uri="{FF2B5EF4-FFF2-40B4-BE49-F238E27FC236}">
-                <a16:creationId xmlns:a16="http://schemas.microsoft.com/office/drawing/2014/main" id="{5CA13275-F871-ED52-A470-77C3603D1467}"/>
+      <p:sp>
+        <p:nvSpPr>
+          <p:cNvPr id="24" name="Rectangle 23">
+            <a:extLst>
+              <a:ext uri="{FF2B5EF4-FFF2-40B4-BE49-F238E27FC236}">
+                <a16:creationId xmlns:a16="http://schemas.microsoft.com/office/drawing/2014/main" id="{3E8D0D15-C44D-2F9C-155D-FA5131A39804}"/>
               </a:ext>
             </a:extLst>
           </p:cNvPr>
@@ -6325,27 +6779,107 @@
         </p:nvSpPr>
         <p:spPr>
           <a:xfrm>
-            <a:off x="1714926" y="1028322"/>
-            <a:ext cx="148702" cy="1568992"/>
-          </a:xfrm>
-          <a:prstGeom prst="rect">
-            <a:avLst/>
-          </a:prstGeom>
-          <a:solidFill>
-            <a:srgbClr val="BEBFC3">
-              <a:alpha val="20000"/>
-            </a:srgbClr>
-          </a:solidFill>
+            <a:off x="3955762" y="1305166"/>
+            <a:ext cx="2492691" cy="416305"/>
+          </a:xfrm>
+          <a:custGeom>
+            <a:avLst/>
+            <a:gdLst>
+              <a:gd name="connsiteX0" fmla="*/ 0 w 2492691"/>
+              <a:gd name="connsiteY0" fmla="*/ 0 h 375665"/>
+              <a:gd name="connsiteX1" fmla="*/ 2492691 w 2492691"/>
+              <a:gd name="connsiteY1" fmla="*/ 0 h 375665"/>
+              <a:gd name="connsiteX2" fmla="*/ 2492691 w 2492691"/>
+              <a:gd name="connsiteY2" fmla="*/ 375665 h 375665"/>
+              <a:gd name="connsiteX3" fmla="*/ 0 w 2492691"/>
+              <a:gd name="connsiteY3" fmla="*/ 375665 h 375665"/>
+              <a:gd name="connsiteX4" fmla="*/ 0 w 2492691"/>
+              <a:gd name="connsiteY4" fmla="*/ 0 h 375665"/>
+              <a:gd name="connsiteX0" fmla="*/ 0 w 2492691"/>
+              <a:gd name="connsiteY0" fmla="*/ 0 h 416305"/>
+              <a:gd name="connsiteX1" fmla="*/ 2492691 w 2492691"/>
+              <a:gd name="connsiteY1" fmla="*/ 0 h 416305"/>
+              <a:gd name="connsiteX2" fmla="*/ 2492691 w 2492691"/>
+              <a:gd name="connsiteY2" fmla="*/ 375665 h 416305"/>
+              <a:gd name="connsiteX3" fmla="*/ 0 w 2492691"/>
+              <a:gd name="connsiteY3" fmla="*/ 416305 h 416305"/>
+              <a:gd name="connsiteX4" fmla="*/ 0 w 2492691"/>
+              <a:gd name="connsiteY4" fmla="*/ 0 h 416305"/>
+              <a:gd name="connsiteX0" fmla="*/ 386080 w 2492691"/>
+              <a:gd name="connsiteY0" fmla="*/ 147320 h 416305"/>
+              <a:gd name="connsiteX1" fmla="*/ 2492691 w 2492691"/>
+              <a:gd name="connsiteY1" fmla="*/ 0 h 416305"/>
+              <a:gd name="connsiteX2" fmla="*/ 2492691 w 2492691"/>
+              <a:gd name="connsiteY2" fmla="*/ 375665 h 416305"/>
+              <a:gd name="connsiteX3" fmla="*/ 0 w 2492691"/>
+              <a:gd name="connsiteY3" fmla="*/ 416305 h 416305"/>
+              <a:gd name="connsiteX4" fmla="*/ 386080 w 2492691"/>
+              <a:gd name="connsiteY4" fmla="*/ 147320 h 416305"/>
+              <a:gd name="connsiteX0" fmla="*/ 66040 w 2492691"/>
+              <a:gd name="connsiteY0" fmla="*/ 137160 h 416305"/>
+              <a:gd name="connsiteX1" fmla="*/ 2492691 w 2492691"/>
+              <a:gd name="connsiteY1" fmla="*/ 0 h 416305"/>
+              <a:gd name="connsiteX2" fmla="*/ 2492691 w 2492691"/>
+              <a:gd name="connsiteY2" fmla="*/ 375665 h 416305"/>
+              <a:gd name="connsiteX3" fmla="*/ 0 w 2492691"/>
+              <a:gd name="connsiteY3" fmla="*/ 416305 h 416305"/>
+              <a:gd name="connsiteX4" fmla="*/ 66040 w 2492691"/>
+              <a:gd name="connsiteY4" fmla="*/ 137160 h 416305"/>
+            </a:gdLst>
+            <a:ahLst/>
+            <a:cxnLst>
+              <a:cxn ang="0">
+                <a:pos x="connsiteX0" y="connsiteY0"/>
+              </a:cxn>
+              <a:cxn ang="0">
+                <a:pos x="connsiteX1" y="connsiteY1"/>
+              </a:cxn>
+              <a:cxn ang="0">
+                <a:pos x="connsiteX2" y="connsiteY2"/>
+              </a:cxn>
+              <a:cxn ang="0">
+                <a:pos x="connsiteX3" y="connsiteY3"/>
+              </a:cxn>
+              <a:cxn ang="0">
+                <a:pos x="connsiteX4" y="connsiteY4"/>
+              </a:cxn>
+            </a:cxnLst>
+            <a:rect l="l" t="t" r="r" b="b"/>
+            <a:pathLst>
+              <a:path w="2492691" h="416305">
+                <a:moveTo>
+                  <a:pt x="66040" y="137160"/>
+                </a:moveTo>
+                <a:lnTo>
+                  <a:pt x="2492691" y="0"/>
+                </a:lnTo>
+                <a:lnTo>
+                  <a:pt x="2492691" y="375665"/>
+                </a:lnTo>
+                <a:lnTo>
+                  <a:pt x="0" y="416305"/>
+                </a:lnTo>
+                <a:lnTo>
+                  <a:pt x="66040" y="137160"/>
+                </a:lnTo>
+                <a:close/>
+              </a:path>
+            </a:pathLst>
+          </a:custGeom>
+          <a:gradFill>
+            <a:gsLst>
+              <a:gs pos="100000">
+                <a:srgbClr val="FFFFFE"/>
+              </a:gs>
+              <a:gs pos="0">
+                <a:srgbClr val="897F75"/>
+              </a:gs>
+            </a:gsLst>
+            <a:lin ang="0" scaled="0"/>
+          </a:gradFill>
           <a:ln>
             <a:noFill/>
           </a:ln>
-          <a:effectLst>
-            <a:glow rad="254000">
-              <a:srgbClr val="BEBFC3">
-                <a:alpha val="60000"/>
-              </a:srgbClr>
-            </a:glow>
-          </a:effectLst>
         </p:spPr>
         <p:style>
           <a:lnRef idx="2">
@@ -6374,10 +6908,10 @@
       </p:sp>
       <p:sp>
         <p:nvSpPr>
-          <p:cNvPr id="1033" name="正方形/長方形 1032">
-            <a:extLst>
-              <a:ext uri="{FF2B5EF4-FFF2-40B4-BE49-F238E27FC236}">
-                <a16:creationId xmlns:a16="http://schemas.microsoft.com/office/drawing/2014/main" id="{487E3B21-3095-6A95-BD45-3C65CF3CA1A3}"/>
+          <p:cNvPr id="25" name="Rectangle 24">
+            <a:extLst>
+              <a:ext uri="{FF2B5EF4-FFF2-40B4-BE49-F238E27FC236}">
+                <a16:creationId xmlns:a16="http://schemas.microsoft.com/office/drawing/2014/main" id="{568C069A-395B-CDD4-CD78-B0928FBE2601}"/>
               </a:ext>
             </a:extLst>
           </p:cNvPr>
@@ -6386,27 +6920,12 @@
         </p:nvSpPr>
         <p:spPr>
           <a:xfrm>
-            <a:off x="4587827" y="1028321"/>
-            <a:ext cx="148702" cy="1593145"/>
+            <a:off x="12710842" y="1255056"/>
+            <a:ext cx="7663639" cy="7184695"/>
           </a:xfrm>
           <a:prstGeom prst="rect">
             <a:avLst/>
           </a:prstGeom>
-          <a:solidFill>
-            <a:srgbClr val="BEBFC3">
-              <a:alpha val="20000"/>
-            </a:srgbClr>
-          </a:solidFill>
-          <a:ln>
-            <a:noFill/>
-          </a:ln>
-          <a:effectLst>
-            <a:glow rad="127000">
-              <a:srgbClr val="BEBFC3">
-                <a:alpha val="60000"/>
-              </a:srgbClr>
-            </a:glow>
-          </a:effectLst>
         </p:spPr>
         <p:style>
           <a:lnRef idx="2">
@@ -6435,10 +6954,10 @@
       </p:sp>
       <p:pic>
         <p:nvPicPr>
-          <p:cNvPr id="1034" name="図 1033">
-            <a:extLst>
-              <a:ext uri="{FF2B5EF4-FFF2-40B4-BE49-F238E27FC236}">
-                <a16:creationId xmlns:a16="http://schemas.microsoft.com/office/drawing/2014/main" id="{1395EC2C-8CAD-3E76-9273-495DA36824C2}"/>
+          <p:cNvPr id="21" name="Picture 20">
+            <a:extLst>
+              <a:ext uri="{FF2B5EF4-FFF2-40B4-BE49-F238E27FC236}">
+                <a16:creationId xmlns:a16="http://schemas.microsoft.com/office/drawing/2014/main" id="{BBF3137E-EAA2-4768-5F28-68D7869ED560}"/>
               </a:ext>
             </a:extLst>
           </p:cNvPr>
@@ -6448,16 +6967,46 @@
           <p:nvPr/>
         </p:nvPicPr>
         <p:blipFill>
-          <a:blip r:embed="rId2">
+          <a:blip r:embed="rId9"/>
+          <a:stretch>
+            <a:fillRect/>
+          </a:stretch>
+        </p:blipFill>
+        <p:spPr>
+          <a:xfrm>
+            <a:off x="3657600" y="990600"/>
+            <a:ext cx="4876800" cy="4876800"/>
+          </a:xfrm>
+          <a:prstGeom prst="rect">
+            <a:avLst/>
+          </a:prstGeom>
+        </p:spPr>
+      </p:pic>
+      <p:pic>
+        <p:nvPicPr>
+          <p:cNvPr id="7" name="Picture 6">
+            <a:extLst>
+              <a:ext uri="{FF2B5EF4-FFF2-40B4-BE49-F238E27FC236}">
+                <a16:creationId xmlns:a16="http://schemas.microsoft.com/office/drawing/2014/main" id="{30DA3DCE-3E36-8077-9749-47DBFC539FF5}"/>
+              </a:ext>
+            </a:extLst>
+          </p:cNvPr>
+          <p:cNvPicPr>
+            <a:picLocks noChangeAspect="1"/>
+          </p:cNvPicPr>
+          <p:nvPr/>
+        </p:nvPicPr>
+        <p:blipFill>
+          <a:blip r:embed="rId7">
             <a:extLst>
               <a:ext uri="{BEBA8EAE-BF5A-486C-A8C5-ECC9F3942E4B}">
                 <a14:imgProps xmlns:a14="http://schemas.microsoft.com/office/drawing/2010/main">
-                  <a14:imgLayer r:embed="rId3">
+                  <a14:imgLayer r:embed="rId8">
                     <a14:imgEffect>
-                      <a14:sharpenSoften amount="48000"/>
+                      <a14:saturation sat="105000"/>
                     </a14:imgEffect>
                     <a14:imgEffect>
-                      <a14:brightnessContrast bright="24000"/>
+                      <a14:brightnessContrast bright="15000" contrast="-10000"/>
                     </a14:imgEffect>
                   </a14:imgLayer>
                 </a14:imgProps>
@@ -6473,240 +7022,8 @@
         </p:blipFill>
         <p:spPr>
           <a:xfrm>
-            <a:off x="312992" y="679423"/>
-            <a:ext cx="2915975" cy="1992735"/>
-          </a:xfrm>
-          <a:prstGeom prst="rect">
-            <a:avLst/>
-          </a:prstGeom>
-        </p:spPr>
-      </p:pic>
-      <p:pic>
-        <p:nvPicPr>
-          <p:cNvPr id="1035" name="図 1034">
-            <a:extLst>
-              <a:ext uri="{FF2B5EF4-FFF2-40B4-BE49-F238E27FC236}">
-                <a16:creationId xmlns:a16="http://schemas.microsoft.com/office/drawing/2014/main" id="{7A2190E7-1D3D-908B-72B3-2DB834289D90}"/>
-              </a:ext>
-            </a:extLst>
-          </p:cNvPr>
-          <p:cNvPicPr>
-            <a:picLocks noChangeAspect="1"/>
-          </p:cNvPicPr>
-          <p:nvPr/>
-        </p:nvPicPr>
-        <p:blipFill>
-          <a:blip r:embed="rId2">
-            <a:extLst>
-              <a:ext uri="{BEBA8EAE-BF5A-486C-A8C5-ECC9F3942E4B}">
-                <a14:imgProps xmlns:a14="http://schemas.microsoft.com/office/drawing/2010/main">
-                  <a14:imgLayer r:embed="rId3">
-                    <a14:imgEffect>
-                      <a14:sharpenSoften amount="48000"/>
-                    </a14:imgEffect>
-                    <a14:imgEffect>
-                      <a14:brightnessContrast bright="24000"/>
-                    </a14:imgEffect>
-                  </a14:imgLayer>
-                </a14:imgProps>
-              </a:ext>
-              <a:ext uri="{28A0092B-C50C-407E-A947-70E740481C1C}">
-                <a14:useLocalDpi xmlns:a14="http://schemas.microsoft.com/office/drawing/2010/main" val="0"/>
-              </a:ext>
-            </a:extLst>
-          </a:blip>
-          <a:stretch>
-            <a:fillRect/>
-          </a:stretch>
-        </p:blipFill>
-        <p:spPr>
-          <a:xfrm flipH="1">
-            <a:off x="3220357" y="679422"/>
-            <a:ext cx="2911623" cy="1992735"/>
-          </a:xfrm>
-          <a:prstGeom prst="rect">
-            <a:avLst/>
-          </a:prstGeom>
-        </p:spPr>
-      </p:pic>
-      <p:sp>
-        <p:nvSpPr>
-          <p:cNvPr id="1036" name="正方形/長方形 1035">
-            <a:extLst>
-              <a:ext uri="{FF2B5EF4-FFF2-40B4-BE49-F238E27FC236}">
-                <a16:creationId xmlns:a16="http://schemas.microsoft.com/office/drawing/2014/main" id="{BF6A27BD-1515-A52C-F284-C97E7C56C562}"/>
-              </a:ext>
-            </a:extLst>
-          </p:cNvPr>
-          <p:cNvSpPr/>
-          <p:nvPr/>
-        </p:nvSpPr>
-        <p:spPr>
-          <a:xfrm>
-            <a:off x="227118" y="3071343"/>
-            <a:ext cx="5897808" cy="81832"/>
-          </a:xfrm>
-          <a:prstGeom prst="rect">
-            <a:avLst/>
-          </a:prstGeom>
-          <a:gradFill>
-            <a:gsLst>
-              <a:gs pos="0">
-                <a:schemeClr val="tx1">
-                  <a:lumMod val="100000"/>
-                </a:schemeClr>
-              </a:gs>
-              <a:gs pos="100000">
-                <a:schemeClr val="tx1">
-                  <a:lumMod val="85000"/>
-                  <a:lumOff val="15000"/>
-                  <a:alpha val="0"/>
-                </a:schemeClr>
-              </a:gs>
-            </a:gsLst>
-            <a:lin ang="5400000" scaled="1"/>
-          </a:gradFill>
-          <a:ln w="31750">
-            <a:noFill/>
-          </a:ln>
-        </p:spPr>
-        <p:style>
-          <a:lnRef idx="2">
-            <a:schemeClr val="accent1">
-              <a:shade val="15000"/>
-            </a:schemeClr>
-          </a:lnRef>
-          <a:fillRef idx="1">
-            <a:schemeClr val="accent1"/>
-          </a:fillRef>
-          <a:effectRef idx="0">
-            <a:schemeClr val="accent1"/>
-          </a:effectRef>
-          <a:fontRef idx="minor">
-            <a:schemeClr val="lt1"/>
-          </a:fontRef>
-        </p:style>
-        <p:txBody>
-          <a:bodyPr rtlCol="0" anchor="ctr"/>
-          <a:lstStyle/>
-          <a:p>
-            <a:pPr algn="ctr"/>
-            <a:endParaRPr kumimoji="1" lang="ja-JP" altLang="en-US"/>
-          </a:p>
-        </p:txBody>
-      </p:sp>
-      <p:sp>
-        <p:nvSpPr>
-          <p:cNvPr id="1037" name="正方形/長方形 1036">
-            <a:extLst>
-              <a:ext uri="{FF2B5EF4-FFF2-40B4-BE49-F238E27FC236}">
-                <a16:creationId xmlns:a16="http://schemas.microsoft.com/office/drawing/2014/main" id="{E4CB871B-57A6-9993-A032-2FE2FAF71859}"/>
-              </a:ext>
-            </a:extLst>
-          </p:cNvPr>
-          <p:cNvSpPr/>
-          <p:nvPr/>
-        </p:nvSpPr>
-        <p:spPr>
-          <a:xfrm>
-            <a:off x="230928" y="2673455"/>
-            <a:ext cx="11747987" cy="395983"/>
-          </a:xfrm>
-          <a:prstGeom prst="rect">
-            <a:avLst/>
-          </a:prstGeom>
-          <a:solidFill>
-            <a:srgbClr val="98999E"/>
-          </a:solidFill>
-          <a:ln w="31750">
-            <a:noFill/>
-          </a:ln>
-        </p:spPr>
-        <p:style>
-          <a:lnRef idx="2">
-            <a:schemeClr val="accent1">
-              <a:shade val="15000"/>
-            </a:schemeClr>
-          </a:lnRef>
-          <a:fillRef idx="1">
-            <a:schemeClr val="accent1"/>
-          </a:fillRef>
-          <a:effectRef idx="0">
-            <a:schemeClr val="accent1"/>
-          </a:effectRef>
-          <a:fontRef idx="minor">
-            <a:schemeClr val="lt1"/>
-          </a:fontRef>
-        </p:style>
-        <p:txBody>
-          <a:bodyPr rtlCol="0" anchor="ctr"/>
-          <a:lstStyle/>
-          <a:p>
-            <a:pPr algn="ctr"/>
-            <a:endParaRPr kumimoji="1" lang="ja-JP" altLang="en-US"/>
-          </a:p>
-        </p:txBody>
-      </p:sp>
-      <p:pic>
-        <p:nvPicPr>
-          <p:cNvPr id="1038" name="図 1037">
-            <a:extLst>
-              <a:ext uri="{FF2B5EF4-FFF2-40B4-BE49-F238E27FC236}">
-                <a16:creationId xmlns:a16="http://schemas.microsoft.com/office/drawing/2014/main" id="{791425E8-996A-90E3-058C-47C18921D2A3}"/>
-              </a:ext>
-            </a:extLst>
-          </p:cNvPr>
-          <p:cNvPicPr>
-            <a:picLocks noChangeAspect="1"/>
-          </p:cNvPicPr>
-          <p:nvPr/>
-        </p:nvPicPr>
-        <p:blipFill>
-          <a:blip r:embed="rId4">
-            <a:extLst>
-              <a:ext uri="{28A0092B-C50C-407E-A947-70E740481C1C}">
-                <a14:useLocalDpi xmlns:a14="http://schemas.microsoft.com/office/drawing/2010/main" val="0"/>
-              </a:ext>
-            </a:extLst>
-          </a:blip>
-          <a:stretch>
-            <a:fillRect/>
-          </a:stretch>
-        </p:blipFill>
-        <p:spPr>
-          <a:xfrm>
-            <a:off x="2115756" y="2730914"/>
-            <a:ext cx="2270464" cy="281063"/>
-          </a:xfrm>
-          <a:prstGeom prst="rect">
-            <a:avLst/>
-          </a:prstGeom>
-        </p:spPr>
-      </p:pic>
-      <p:pic>
-        <p:nvPicPr>
-          <p:cNvPr id="31" name="図 30">
-            <a:extLst>
-              <a:ext uri="{FF2B5EF4-FFF2-40B4-BE49-F238E27FC236}">
-                <a16:creationId xmlns:a16="http://schemas.microsoft.com/office/drawing/2014/main" id="{2069C22F-0D3A-65D2-9B20-251DE909FD5C}"/>
-              </a:ext>
-            </a:extLst>
-          </p:cNvPr>
-          <p:cNvPicPr>
-            <a:picLocks noChangeAspect="1"/>
-          </p:cNvPicPr>
-          <p:nvPr/>
-        </p:nvPicPr>
-        <p:blipFill>
-          <a:blip r:embed="rId5"/>
-          <a:stretch>
-            <a:fillRect/>
-          </a:stretch>
-        </p:blipFill>
-        <p:spPr>
-          <a:xfrm>
-            <a:off x="6365459" y="2748299"/>
-            <a:ext cx="603874" cy="233758"/>
+            <a:off x="14104261" y="2405571"/>
+            <a:ext cx="4876800" cy="4876800"/>
           </a:xfrm>
           <a:prstGeom prst="rect">
             <a:avLst/>
@@ -6716,7 +7033,7 @@
     </p:spTree>
     <p:extLst>
       <p:ext uri="{BB962C8B-B14F-4D97-AF65-F5344CB8AC3E}">
-        <p14:creationId xmlns:p14="http://schemas.microsoft.com/office/powerpoint/2010/main" val="2302734688"/>
+        <p14:creationId xmlns:p14="http://schemas.microsoft.com/office/powerpoint/2010/main" val="1472433418"/>
       </p:ext>
     </p:extLst>
   </p:cSld>
@@ -6753,10 +7070,10 @@
       </p:grpSpPr>
       <p:sp>
         <p:nvSpPr>
-          <p:cNvPr id="4" name="正方形/長方形 3">
-            <a:extLst>
-              <a:ext uri="{FF2B5EF4-FFF2-40B4-BE49-F238E27FC236}">
-                <a16:creationId xmlns:a16="http://schemas.microsoft.com/office/drawing/2014/main" id="{2F5253A5-12DF-EDA1-33CF-ABDDB098F11C}"/>
+          <p:cNvPr id="2" name="正方形/長方形 1">
+            <a:extLst>
+              <a:ext uri="{FF2B5EF4-FFF2-40B4-BE49-F238E27FC236}">
+                <a16:creationId xmlns:a16="http://schemas.microsoft.com/office/drawing/2014/main" id="{BBEBA10E-FD32-997D-0F16-E6BC86232326}"/>
               </a:ext>
             </a:extLst>
           </p:cNvPr>
@@ -6765,26 +7082,15 @@
         </p:nvSpPr>
         <p:spPr>
           <a:xfrm>
-            <a:off x="6205682" y="2945751"/>
+            <a:off x="6123618" y="2895599"/>
             <a:ext cx="5784525" cy="2885183"/>
           </a:xfrm>
           <a:prstGeom prst="rect">
             <a:avLst/>
           </a:prstGeom>
-          <a:gradFill>
-            <a:gsLst>
-              <a:gs pos="0">
-                <a:srgbClr val="7D8383"/>
-              </a:gs>
-              <a:gs pos="47000">
-                <a:srgbClr val="757B79"/>
-              </a:gs>
-              <a:gs pos="100000">
-                <a:srgbClr val="717777"/>
-              </a:gs>
-            </a:gsLst>
-            <a:lin ang="5400000" scaled="1"/>
-          </a:gradFill>
+          <a:solidFill>
+            <a:srgbClr val="919FA1"/>
+          </a:solidFill>
           <a:ln>
             <a:noFill/>
           </a:ln>
@@ -6816,10 +7122,10 @@
       </p:sp>
       <p:sp>
         <p:nvSpPr>
-          <p:cNvPr id="6" name="正方形/長方形 5">
-            <a:extLst>
-              <a:ext uri="{FF2B5EF4-FFF2-40B4-BE49-F238E27FC236}">
-                <a16:creationId xmlns:a16="http://schemas.microsoft.com/office/drawing/2014/main" id="{2F73EC64-4F63-59A5-75DF-1B4FF772CEF1}"/>
+          <p:cNvPr id="7" name="正方形/長方形 6">
+            <a:extLst>
+              <a:ext uri="{FF2B5EF4-FFF2-40B4-BE49-F238E27FC236}">
+                <a16:creationId xmlns:a16="http://schemas.microsoft.com/office/drawing/2014/main" id="{06FB6F7C-B702-1038-6DFF-F0FD2C982FD9}"/>
               </a:ext>
             </a:extLst>
           </p:cNvPr>
@@ -6828,7 +7134,7 @@
         </p:nvSpPr>
         <p:spPr>
           <a:xfrm>
-            <a:off x="-234064" y="3791729"/>
+            <a:off x="6113231" y="737051"/>
             <a:ext cx="5784526" cy="2158548"/>
           </a:xfrm>
           <a:prstGeom prst="rect">
@@ -6866,111 +7172,12 @@
           </a:p>
         </p:txBody>
       </p:sp>
-      <p:sp>
-        <p:nvSpPr>
-          <p:cNvPr id="5" name="正方形/長方形 4">
-            <a:extLst>
-              <a:ext uri="{FF2B5EF4-FFF2-40B4-BE49-F238E27FC236}">
-                <a16:creationId xmlns:a16="http://schemas.microsoft.com/office/drawing/2014/main" id="{FE3ECDA9-8C8D-00AA-3DB4-C34D34A6C11A}"/>
-              </a:ext>
-            </a:extLst>
-          </p:cNvPr>
-          <p:cNvSpPr/>
-          <p:nvPr/>
-        </p:nvSpPr>
-        <p:spPr>
-          <a:xfrm>
-            <a:off x="6096000" y="2747759"/>
-            <a:ext cx="5964980" cy="395983"/>
-          </a:xfrm>
-          <a:prstGeom prst="rect">
-            <a:avLst/>
-          </a:prstGeom>
-          <a:solidFill>
-            <a:srgbClr val="626061"/>
-          </a:solidFill>
-          <a:ln w="31750">
-            <a:solidFill>
-              <a:schemeClr val="tx1"/>
-            </a:solidFill>
-          </a:ln>
-        </p:spPr>
-        <p:style>
-          <a:lnRef idx="2">
-            <a:schemeClr val="accent1">
-              <a:shade val="15000"/>
-            </a:schemeClr>
-          </a:lnRef>
-          <a:fillRef idx="1">
-            <a:schemeClr val="accent1"/>
-          </a:fillRef>
-          <a:effectRef idx="0">
-            <a:schemeClr val="accent1"/>
-          </a:effectRef>
-          <a:fontRef idx="minor">
-            <a:schemeClr val="lt1"/>
-          </a:fontRef>
-        </p:style>
-        <p:txBody>
-          <a:bodyPr rtlCol="0" anchor="ctr"/>
-          <a:lstStyle/>
-          <a:p>
-            <a:pPr algn="ctr"/>
-            <a:endParaRPr kumimoji="1" lang="ja-JP" altLang="en-US"/>
-          </a:p>
-        </p:txBody>
-      </p:sp>
-      <p:pic>
-        <p:nvPicPr>
-          <p:cNvPr id="1026" name="Picture 2">
-            <a:extLst>
-              <a:ext uri="{FF2B5EF4-FFF2-40B4-BE49-F238E27FC236}">
-                <a16:creationId xmlns:a16="http://schemas.microsoft.com/office/drawing/2014/main" id="{FBBB064D-89CA-9A59-4999-6ACEDDFDCCA3}"/>
-              </a:ext>
-            </a:extLst>
-          </p:cNvPr>
-          <p:cNvPicPr>
-            <a:picLocks noChangeAspect="1" noChangeArrowheads="1"/>
-          </p:cNvPicPr>
-          <p:nvPr/>
-        </p:nvPicPr>
-        <p:blipFill rotWithShape="1">
-          <a:blip r:embed="rId2">
-            <a:extLst>
-              <a:ext uri="{28A0092B-C50C-407E-A947-70E740481C1C}">
-                <a14:useLocalDpi xmlns:a14="http://schemas.microsoft.com/office/drawing/2010/main" val="0"/>
-              </a:ext>
-            </a:extLst>
-          </a:blip>
-          <a:srcRect r="50873"/>
-          <a:stretch/>
-        </p:blipFill>
-        <p:spPr bwMode="auto">
-          <a:xfrm>
-            <a:off x="-155393" y="0"/>
-            <a:ext cx="1946602" cy="3429000"/>
-          </a:xfrm>
-          <a:prstGeom prst="rect">
-            <a:avLst/>
-          </a:prstGeom>
-          <a:noFill/>
-          <a:extLst>
-            <a:ext uri="{909E8E84-426E-40DD-AFC4-6F175D3DCCD1}">
-              <a14:hiddenFill xmlns:a14="http://schemas.microsoft.com/office/drawing/2010/main">
-                <a:solidFill>
-                  <a:srgbClr val="FFFFFF"/>
-                </a:solidFill>
-              </a14:hiddenFill>
-            </a:ext>
-          </a:extLst>
-        </p:spPr>
-      </p:pic>
       <p:cxnSp>
         <p:nvCxnSpPr>
-          <p:cNvPr id="8" name="直線コネクタ 7">
-            <a:extLst>
-              <a:ext uri="{FF2B5EF4-FFF2-40B4-BE49-F238E27FC236}">
-                <a16:creationId xmlns:a16="http://schemas.microsoft.com/office/drawing/2014/main" id="{D3105DBF-276D-3295-8405-BDD9A360A5BE}"/>
+          <p:cNvPr id="18" name="直線コネクタ 17">
+            <a:extLst>
+              <a:ext uri="{FF2B5EF4-FFF2-40B4-BE49-F238E27FC236}">
+                <a16:creationId xmlns:a16="http://schemas.microsoft.com/office/drawing/2014/main" id="{1ED74575-413E-8807-67C9-0C9DE6A4A37B}"/>
               </a:ext>
             </a:extLst>
           </p:cNvPr>
@@ -6981,8 +7188,149 @@
         </p:nvCxnSpPr>
         <p:spPr>
           <a:xfrm>
-            <a:off x="7654349" y="3143742"/>
+            <a:off x="7572285" y="3093590"/>
             <a:ext cx="0" cy="2819530"/>
+          </a:xfrm>
+          <a:prstGeom prst="line">
+            <a:avLst/>
+          </a:prstGeom>
+          <a:ln w="25400">
+            <a:solidFill>
+              <a:schemeClr val="tx1">
+                <a:lumMod val="75000"/>
+                <a:lumOff val="25000"/>
+                <a:alpha val="90000"/>
+              </a:schemeClr>
+            </a:solidFill>
+          </a:ln>
+        </p:spPr>
+        <p:style>
+          <a:lnRef idx="1">
+            <a:schemeClr val="accent1"/>
+          </a:lnRef>
+          <a:fillRef idx="0">
+            <a:schemeClr val="accent1"/>
+          </a:fillRef>
+          <a:effectRef idx="0">
+            <a:schemeClr val="accent1"/>
+          </a:effectRef>
+          <a:fontRef idx="minor">
+            <a:schemeClr val="tx1"/>
+          </a:fontRef>
+        </p:style>
+      </p:cxnSp>
+      <p:cxnSp>
+        <p:nvCxnSpPr>
+          <p:cNvPr id="20" name="直線コネクタ 19">
+            <a:extLst>
+              <a:ext uri="{FF2B5EF4-FFF2-40B4-BE49-F238E27FC236}">
+                <a16:creationId xmlns:a16="http://schemas.microsoft.com/office/drawing/2014/main" id="{1C964DFC-012E-C826-4875-430AF03CB9D9}"/>
+              </a:ext>
+            </a:extLst>
+          </p:cNvPr>
+          <p:cNvCxnSpPr>
+            <a:cxnSpLocks/>
+          </p:cNvCxnSpPr>
+          <p:nvPr/>
+        </p:nvCxnSpPr>
+        <p:spPr>
+          <a:xfrm>
+            <a:off x="9005494" y="3087915"/>
+            <a:ext cx="3243" cy="2825205"/>
+          </a:xfrm>
+          <a:prstGeom prst="line">
+            <a:avLst/>
+          </a:prstGeom>
+          <a:ln w="25400">
+            <a:solidFill>
+              <a:schemeClr val="tx1">
+                <a:lumMod val="85000"/>
+                <a:lumOff val="15000"/>
+                <a:alpha val="90000"/>
+              </a:schemeClr>
+            </a:solidFill>
+          </a:ln>
+        </p:spPr>
+        <p:style>
+          <a:lnRef idx="1">
+            <a:schemeClr val="accent1"/>
+          </a:lnRef>
+          <a:fillRef idx="0">
+            <a:schemeClr val="accent1"/>
+          </a:fillRef>
+          <a:effectRef idx="0">
+            <a:schemeClr val="accent1"/>
+          </a:effectRef>
+          <a:fontRef idx="minor">
+            <a:schemeClr val="tx1"/>
+          </a:fontRef>
+        </p:style>
+      </p:cxnSp>
+      <p:cxnSp>
+        <p:nvCxnSpPr>
+          <p:cNvPr id="21" name="直線コネクタ 20">
+            <a:extLst>
+              <a:ext uri="{FF2B5EF4-FFF2-40B4-BE49-F238E27FC236}">
+                <a16:creationId xmlns:a16="http://schemas.microsoft.com/office/drawing/2014/main" id="{5E8CBAA7-8CE0-6CF3-A272-78D7E25BB4D3}"/>
+              </a:ext>
+            </a:extLst>
+          </p:cNvPr>
+          <p:cNvCxnSpPr>
+            <a:cxnSpLocks/>
+          </p:cNvCxnSpPr>
+          <p:nvPr/>
+        </p:nvCxnSpPr>
+        <p:spPr>
+          <a:xfrm>
+            <a:off x="10461400" y="3087914"/>
+            <a:ext cx="0" cy="2825206"/>
+          </a:xfrm>
+          <a:prstGeom prst="line">
+            <a:avLst/>
+          </a:prstGeom>
+          <a:ln w="25400">
+            <a:solidFill>
+              <a:schemeClr val="tx1">
+                <a:lumMod val="85000"/>
+                <a:lumOff val="15000"/>
+                <a:alpha val="90000"/>
+              </a:schemeClr>
+            </a:solidFill>
+          </a:ln>
+        </p:spPr>
+        <p:style>
+          <a:lnRef idx="1">
+            <a:schemeClr val="accent1"/>
+          </a:lnRef>
+          <a:fillRef idx="0">
+            <a:schemeClr val="accent1"/>
+          </a:fillRef>
+          <a:effectRef idx="0">
+            <a:schemeClr val="accent1"/>
+          </a:effectRef>
+          <a:fontRef idx="minor">
+            <a:schemeClr val="tx1"/>
+          </a:fontRef>
+        </p:style>
+      </p:cxnSp>
+      <p:cxnSp>
+        <p:nvCxnSpPr>
+          <p:cNvPr id="22" name="直線コネクタ 21">
+            <a:extLst>
+              <a:ext uri="{FF2B5EF4-FFF2-40B4-BE49-F238E27FC236}">
+                <a16:creationId xmlns:a16="http://schemas.microsoft.com/office/drawing/2014/main" id="{B8D16889-A2A6-4893-0F0B-CA5B5598ACFE}"/>
+              </a:ext>
+            </a:extLst>
+          </p:cNvPr>
+          <p:cNvCxnSpPr>
+            <a:cxnSpLocks/>
+          </p:cNvCxnSpPr>
+          <p:nvPr/>
+        </p:nvCxnSpPr>
+        <p:spPr>
+          <a:xfrm>
+            <a:off x="11878396" y="680720"/>
+            <a:ext cx="0" cy="5100062"/>
           </a:xfrm>
           <a:prstGeom prst="line">
             <a:avLst/>
@@ -7013,10 +7361,10 @@
       </p:cxnSp>
       <p:cxnSp>
         <p:nvCxnSpPr>
-          <p:cNvPr id="9" name="直線コネクタ 8">
-            <a:extLst>
-              <a:ext uri="{FF2B5EF4-FFF2-40B4-BE49-F238E27FC236}">
-                <a16:creationId xmlns:a16="http://schemas.microsoft.com/office/drawing/2014/main" id="{53FE7450-22FF-A8E1-4BCE-587A78B780C8}"/>
+          <p:cNvPr id="24" name="直線コネクタ 23">
+            <a:extLst>
+              <a:ext uri="{FF2B5EF4-FFF2-40B4-BE49-F238E27FC236}">
+                <a16:creationId xmlns:a16="http://schemas.microsoft.com/office/drawing/2014/main" id="{0CC613F5-8F8A-56C6-FB3E-FD9FD05867C0}"/>
               </a:ext>
             </a:extLst>
           </p:cNvPr>
@@ -7027,8 +7375,8 @@
         </p:nvCxnSpPr>
         <p:spPr>
           <a:xfrm>
-            <a:off x="9087558" y="3138067"/>
-            <a:ext cx="3243" cy="2825205"/>
+            <a:off x="6013935" y="4328464"/>
+            <a:ext cx="6040123" cy="0"/>
           </a:xfrm>
           <a:prstGeom prst="line">
             <a:avLst/>
@@ -7038,6 +7386,7 @@
               <a:schemeClr val="tx1">
                 <a:lumMod val="85000"/>
                 <a:lumOff val="15000"/>
+                <a:alpha val="90000"/>
               </a:schemeClr>
             </a:solidFill>
           </a:ln>
@@ -7057,150 +7406,12 @@
           </a:fontRef>
         </p:style>
       </p:cxnSp>
-      <p:cxnSp>
-        <p:nvCxnSpPr>
-          <p:cNvPr id="10" name="直線コネクタ 9">
-            <a:extLst>
-              <a:ext uri="{FF2B5EF4-FFF2-40B4-BE49-F238E27FC236}">
-                <a16:creationId xmlns:a16="http://schemas.microsoft.com/office/drawing/2014/main" id="{88B2AD6D-E2A5-6CC9-BC37-85DA78E7C89F}"/>
-              </a:ext>
-            </a:extLst>
-          </p:cNvPr>
-          <p:cNvCxnSpPr>
-            <a:cxnSpLocks/>
-          </p:cNvCxnSpPr>
-          <p:nvPr/>
-        </p:nvCxnSpPr>
-        <p:spPr>
-          <a:xfrm>
-            <a:off x="10543464" y="3138066"/>
-            <a:ext cx="0" cy="2825206"/>
-          </a:xfrm>
-          <a:prstGeom prst="line">
-            <a:avLst/>
-          </a:prstGeom>
-          <a:ln w="25400">
-            <a:solidFill>
-              <a:schemeClr val="tx1">
-                <a:lumMod val="85000"/>
-                <a:lumOff val="15000"/>
-              </a:schemeClr>
-            </a:solidFill>
-          </a:ln>
-        </p:spPr>
-        <p:style>
-          <a:lnRef idx="1">
-            <a:schemeClr val="accent1"/>
-          </a:lnRef>
-          <a:fillRef idx="0">
-            <a:schemeClr val="accent1"/>
-          </a:fillRef>
-          <a:effectRef idx="0">
-            <a:schemeClr val="accent1"/>
-          </a:effectRef>
-          <a:fontRef idx="minor">
-            <a:schemeClr val="tx1"/>
-          </a:fontRef>
-        </p:style>
-      </p:cxnSp>
-      <p:cxnSp>
-        <p:nvCxnSpPr>
-          <p:cNvPr id="11" name="直線コネクタ 10">
-            <a:extLst>
-              <a:ext uri="{FF2B5EF4-FFF2-40B4-BE49-F238E27FC236}">
-                <a16:creationId xmlns:a16="http://schemas.microsoft.com/office/drawing/2014/main" id="{CD8F9193-5EFC-9DDF-2CF3-ABB748BD9BC0}"/>
-              </a:ext>
-            </a:extLst>
-          </p:cNvPr>
-          <p:cNvCxnSpPr>
-            <a:cxnSpLocks/>
-          </p:cNvCxnSpPr>
-          <p:nvPr/>
-        </p:nvCxnSpPr>
-        <p:spPr>
-          <a:xfrm>
-            <a:off x="11960460" y="730872"/>
-            <a:ext cx="0" cy="5100062"/>
-          </a:xfrm>
-          <a:prstGeom prst="line">
-            <a:avLst/>
-          </a:prstGeom>
-          <a:ln w="25400">
-            <a:solidFill>
-              <a:schemeClr val="tx1">
-                <a:lumMod val="85000"/>
-                <a:lumOff val="15000"/>
-              </a:schemeClr>
-            </a:solidFill>
-          </a:ln>
-        </p:spPr>
-        <p:style>
-          <a:lnRef idx="1">
-            <a:schemeClr val="accent1"/>
-          </a:lnRef>
-          <a:fillRef idx="0">
-            <a:schemeClr val="accent1"/>
-          </a:fillRef>
-          <a:effectRef idx="0">
-            <a:schemeClr val="accent1"/>
-          </a:effectRef>
-          <a:fontRef idx="minor">
-            <a:schemeClr val="tx1"/>
-          </a:fontRef>
-        </p:style>
-      </p:cxnSp>
-      <p:cxnSp>
-        <p:nvCxnSpPr>
-          <p:cNvPr id="12" name="直線コネクタ 11">
-            <a:extLst>
-              <a:ext uri="{FF2B5EF4-FFF2-40B4-BE49-F238E27FC236}">
-                <a16:creationId xmlns:a16="http://schemas.microsoft.com/office/drawing/2014/main" id="{7445F3DD-E39D-099C-73EC-200F00070E92}"/>
-              </a:ext>
-            </a:extLst>
-          </p:cNvPr>
-          <p:cNvCxnSpPr>
-            <a:cxnSpLocks/>
-          </p:cNvCxnSpPr>
-          <p:nvPr/>
-        </p:nvCxnSpPr>
-        <p:spPr>
-          <a:xfrm>
-            <a:off x="6095999" y="4378616"/>
-            <a:ext cx="6040123" cy="0"/>
-          </a:xfrm>
-          <a:prstGeom prst="line">
-            <a:avLst/>
-          </a:prstGeom>
-          <a:ln w="25400">
-            <a:solidFill>
-              <a:schemeClr val="tx1">
-                <a:lumMod val="85000"/>
-                <a:lumOff val="15000"/>
-              </a:schemeClr>
-            </a:solidFill>
-          </a:ln>
-        </p:spPr>
-        <p:style>
-          <a:lnRef idx="1">
-            <a:schemeClr val="accent1"/>
-          </a:lnRef>
-          <a:fillRef idx="0">
-            <a:schemeClr val="accent1"/>
-          </a:fillRef>
-          <a:effectRef idx="0">
-            <a:schemeClr val="accent1"/>
-          </a:effectRef>
-          <a:fontRef idx="minor">
-            <a:schemeClr val="tx1"/>
-          </a:fontRef>
-        </p:style>
-      </p:cxnSp>
-      <p:sp>
-        <p:nvSpPr>
-          <p:cNvPr id="16" name="正方形/長方形 15">
-            <a:extLst>
-              <a:ext uri="{FF2B5EF4-FFF2-40B4-BE49-F238E27FC236}">
-                <a16:creationId xmlns:a16="http://schemas.microsoft.com/office/drawing/2014/main" id="{5A11D569-38F1-6C10-448D-DF6F7E9574FA}"/>
+      <p:sp>
+        <p:nvSpPr>
+          <p:cNvPr id="25" name="正方形/長方形 24">
+            <a:extLst>
+              <a:ext uri="{FF2B5EF4-FFF2-40B4-BE49-F238E27FC236}">
+                <a16:creationId xmlns:a16="http://schemas.microsoft.com/office/drawing/2014/main" id="{DBFB5C14-81D1-7096-A7A6-6D99A00160CA}"/>
               </a:ext>
             </a:extLst>
           </p:cNvPr>
@@ -7209,7 +7420,7 @@
         </p:nvSpPr>
         <p:spPr>
           <a:xfrm>
-            <a:off x="7579998" y="1079771"/>
+            <a:off x="7497934" y="1029619"/>
             <a:ext cx="148702" cy="1568992"/>
           </a:xfrm>
           <a:prstGeom prst="rect">
@@ -7258,10 +7469,10 @@
       </p:sp>
       <p:sp>
         <p:nvSpPr>
-          <p:cNvPr id="17" name="正方形/長方形 16">
-            <a:extLst>
-              <a:ext uri="{FF2B5EF4-FFF2-40B4-BE49-F238E27FC236}">
-                <a16:creationId xmlns:a16="http://schemas.microsoft.com/office/drawing/2014/main" id="{03071D9B-76F0-87B1-7F33-4FDD142B1B4E}"/>
+          <p:cNvPr id="26" name="正方形/長方形 25">
+            <a:extLst>
+              <a:ext uri="{FF2B5EF4-FFF2-40B4-BE49-F238E27FC236}">
+                <a16:creationId xmlns:a16="http://schemas.microsoft.com/office/drawing/2014/main" id="{BEBC149C-70CB-B2D3-08ED-13A9B6D49598}"/>
               </a:ext>
             </a:extLst>
           </p:cNvPr>
@@ -7270,7 +7481,7 @@
         </p:nvSpPr>
         <p:spPr>
           <a:xfrm>
-            <a:off x="10452899" y="1079770"/>
+            <a:off x="10370835" y="1029618"/>
             <a:ext cx="148702" cy="1593145"/>
           </a:xfrm>
           <a:prstGeom prst="rect">
@@ -7319,10 +7530,10 @@
       </p:sp>
       <p:pic>
         <p:nvPicPr>
-          <p:cNvPr id="23" name="図 22">
-            <a:extLst>
-              <a:ext uri="{FF2B5EF4-FFF2-40B4-BE49-F238E27FC236}">
-                <a16:creationId xmlns:a16="http://schemas.microsoft.com/office/drawing/2014/main" id="{E16265FD-1F7A-4416-1C83-8EAB9E4431E6}"/>
+          <p:cNvPr id="27" name="図 26">
+            <a:extLst>
+              <a:ext uri="{FF2B5EF4-FFF2-40B4-BE49-F238E27FC236}">
+                <a16:creationId xmlns:a16="http://schemas.microsoft.com/office/drawing/2014/main" id="{BBEA4A6C-87ED-7436-0D6F-E92D8D6C8184}"/>
               </a:ext>
             </a:extLst>
           </p:cNvPr>
@@ -7332,94 +7543,11 @@
           <p:nvPr/>
         </p:nvPicPr>
         <p:blipFill>
-          <a:blip r:embed="rId3">
-            <a:extLst>
-              <a:ext uri="{28A0092B-C50C-407E-A947-70E740481C1C}">
-                <a14:useLocalDpi xmlns:a14="http://schemas.microsoft.com/office/drawing/2010/main" val="0"/>
-              </a:ext>
-            </a:extLst>
-          </a:blip>
-          <a:stretch>
-            <a:fillRect/>
-          </a:stretch>
-        </p:blipFill>
-        <p:spPr>
-          <a:xfrm>
-            <a:off x="9149537" y="430962"/>
-            <a:ext cx="2131494" cy="316499"/>
-          </a:xfrm>
-          <a:prstGeom prst="rect">
-            <a:avLst/>
-          </a:prstGeom>
-        </p:spPr>
-      </p:pic>
-      <p:pic>
-        <p:nvPicPr>
-          <p:cNvPr id="2050" name="Picture 2">
-            <a:extLst>
-              <a:ext uri="{FF2B5EF4-FFF2-40B4-BE49-F238E27FC236}">
-                <a16:creationId xmlns:a16="http://schemas.microsoft.com/office/drawing/2014/main" id="{BB00F0EF-D70D-4243-A12B-FB3CDCE89800}"/>
-              </a:ext>
-            </a:extLst>
-          </p:cNvPr>
-          <p:cNvPicPr>
-            <a:picLocks noChangeAspect="1" noChangeArrowheads="1"/>
-          </p:cNvPicPr>
-          <p:nvPr/>
-        </p:nvPicPr>
-        <p:blipFill>
-          <a:blip r:embed="rId4">
-            <a:extLst>
-              <a:ext uri="{28A0092B-C50C-407E-A947-70E740481C1C}">
-                <a14:useLocalDpi xmlns:a14="http://schemas.microsoft.com/office/drawing/2010/main" val="0"/>
-              </a:ext>
-            </a:extLst>
-          </a:blip>
-          <a:srcRect/>
-          <a:stretch>
-            <a:fillRect/>
-          </a:stretch>
-        </p:blipFill>
-        <p:spPr bwMode="auto">
-          <a:xfrm>
-            <a:off x="-1128837" y="-65736"/>
-            <a:ext cx="5790008" cy="3860005"/>
-          </a:xfrm>
-          <a:prstGeom prst="rect">
-            <a:avLst/>
-          </a:prstGeom>
-          <a:noFill/>
-          <a:extLst>
-            <a:ext uri="{909E8E84-426E-40DD-AFC4-6F175D3DCCD1}">
-              <a14:hiddenFill xmlns:a14="http://schemas.microsoft.com/office/drawing/2010/main">
-                <a:solidFill>
-                  <a:srgbClr val="FFFFFF"/>
-                </a:solidFill>
-              </a14:hiddenFill>
-            </a:ext>
-          </a:extLst>
-        </p:spPr>
-      </p:pic>
-      <p:pic>
-        <p:nvPicPr>
-          <p:cNvPr id="2" name="図 1">
-            <a:extLst>
-              <a:ext uri="{FF2B5EF4-FFF2-40B4-BE49-F238E27FC236}">
-                <a16:creationId xmlns:a16="http://schemas.microsoft.com/office/drawing/2014/main" id="{8343231E-6BED-AA7C-B824-3D8700A894C5}"/>
-              </a:ext>
-            </a:extLst>
-          </p:cNvPr>
-          <p:cNvPicPr>
-            <a:picLocks noChangeAspect="1"/>
-          </p:cNvPicPr>
-          <p:nvPr/>
-        </p:nvPicPr>
-        <p:blipFill>
-          <a:blip r:embed="rId5">
+          <a:blip r:embed="rId2">
             <a:extLst>
               <a:ext uri="{BEBA8EAE-BF5A-486C-A8C5-ECC9F3942E4B}">
                 <a14:imgProps xmlns:a14="http://schemas.microsoft.com/office/drawing/2010/main">
-                  <a14:imgLayer r:embed="rId6">
+                  <a14:imgLayer r:embed="rId3">
                     <a14:imgEffect>
                       <a14:sharpenSoften amount="48000"/>
                     </a14:imgEffect>
@@ -7440,8 +7568,862 @@
         </p:blipFill>
         <p:spPr>
           <a:xfrm>
-            <a:off x="6102155" y="1375519"/>
-            <a:ext cx="5888049" cy="1403467"/>
+            <a:off x="6096000" y="680720"/>
+            <a:ext cx="2915975" cy="1992735"/>
+          </a:xfrm>
+          <a:prstGeom prst="rect">
+            <a:avLst/>
+          </a:prstGeom>
+        </p:spPr>
+      </p:pic>
+      <p:pic>
+        <p:nvPicPr>
+          <p:cNvPr id="28" name="図 27">
+            <a:extLst>
+              <a:ext uri="{FF2B5EF4-FFF2-40B4-BE49-F238E27FC236}">
+                <a16:creationId xmlns:a16="http://schemas.microsoft.com/office/drawing/2014/main" id="{B01C1BA5-AF7D-483C-8418-F4FAE441EDB9}"/>
+              </a:ext>
+            </a:extLst>
+          </p:cNvPr>
+          <p:cNvPicPr>
+            <a:picLocks noChangeAspect="1"/>
+          </p:cNvPicPr>
+          <p:nvPr/>
+        </p:nvPicPr>
+        <p:blipFill>
+          <a:blip r:embed="rId2">
+            <a:extLst>
+              <a:ext uri="{BEBA8EAE-BF5A-486C-A8C5-ECC9F3942E4B}">
+                <a14:imgProps xmlns:a14="http://schemas.microsoft.com/office/drawing/2010/main">
+                  <a14:imgLayer r:embed="rId3">
+                    <a14:imgEffect>
+                      <a14:sharpenSoften amount="48000"/>
+                    </a14:imgEffect>
+                    <a14:imgEffect>
+                      <a14:brightnessContrast bright="24000"/>
+                    </a14:imgEffect>
+                  </a14:imgLayer>
+                </a14:imgProps>
+              </a:ext>
+              <a:ext uri="{28A0092B-C50C-407E-A947-70E740481C1C}">
+                <a14:useLocalDpi xmlns:a14="http://schemas.microsoft.com/office/drawing/2010/main" val="0"/>
+              </a:ext>
+            </a:extLst>
+          </a:blip>
+          <a:stretch>
+            <a:fillRect/>
+          </a:stretch>
+        </p:blipFill>
+        <p:spPr>
+          <a:xfrm flipH="1">
+            <a:off x="9003365" y="680719"/>
+            <a:ext cx="2911623" cy="1992735"/>
+          </a:xfrm>
+          <a:prstGeom prst="rect">
+            <a:avLst/>
+          </a:prstGeom>
+        </p:spPr>
+      </p:pic>
+      <p:sp>
+        <p:nvSpPr>
+          <p:cNvPr id="29" name="正方形/長方形 28">
+            <a:extLst>
+              <a:ext uri="{FF2B5EF4-FFF2-40B4-BE49-F238E27FC236}">
+                <a16:creationId xmlns:a16="http://schemas.microsoft.com/office/drawing/2014/main" id="{516C9FE8-544D-6F76-254D-07E9ADC1266D}"/>
+              </a:ext>
+            </a:extLst>
+          </p:cNvPr>
+          <p:cNvSpPr/>
+          <p:nvPr/>
+        </p:nvSpPr>
+        <p:spPr>
+          <a:xfrm>
+            <a:off x="6013935" y="3070735"/>
+            <a:ext cx="5964980" cy="81832"/>
+          </a:xfrm>
+          <a:prstGeom prst="rect">
+            <a:avLst/>
+          </a:prstGeom>
+          <a:gradFill>
+            <a:gsLst>
+              <a:gs pos="0">
+                <a:schemeClr val="tx1">
+                  <a:lumMod val="100000"/>
+                </a:schemeClr>
+              </a:gs>
+              <a:gs pos="100000">
+                <a:schemeClr val="tx1">
+                  <a:lumMod val="85000"/>
+                  <a:lumOff val="15000"/>
+                  <a:alpha val="0"/>
+                </a:schemeClr>
+              </a:gs>
+            </a:gsLst>
+            <a:lin ang="5400000" scaled="1"/>
+          </a:gradFill>
+          <a:ln w="31750">
+            <a:noFill/>
+          </a:ln>
+        </p:spPr>
+        <p:style>
+          <a:lnRef idx="2">
+            <a:schemeClr val="accent1">
+              <a:shade val="15000"/>
+            </a:schemeClr>
+          </a:lnRef>
+          <a:fillRef idx="1">
+            <a:schemeClr val="accent1"/>
+          </a:fillRef>
+          <a:effectRef idx="0">
+            <a:schemeClr val="accent1"/>
+          </a:effectRef>
+          <a:fontRef idx="minor">
+            <a:schemeClr val="lt1"/>
+          </a:fontRef>
+        </p:style>
+        <p:txBody>
+          <a:bodyPr rtlCol="0" anchor="ctr"/>
+          <a:lstStyle/>
+          <a:p>
+            <a:pPr algn="ctr"/>
+            <a:endParaRPr kumimoji="1" lang="ja-JP" altLang="en-US"/>
+          </a:p>
+        </p:txBody>
+      </p:sp>
+      <p:sp>
+        <p:nvSpPr>
+          <p:cNvPr id="1024" name="正方形/長方形 1023">
+            <a:extLst>
+              <a:ext uri="{FF2B5EF4-FFF2-40B4-BE49-F238E27FC236}">
+                <a16:creationId xmlns:a16="http://schemas.microsoft.com/office/drawing/2014/main" id="{1F89C9DD-E47E-8558-71E4-AE926E0B67D6}"/>
+              </a:ext>
+            </a:extLst>
+          </p:cNvPr>
+          <p:cNvSpPr/>
+          <p:nvPr/>
+        </p:nvSpPr>
+        <p:spPr>
+          <a:xfrm>
+            <a:off x="340610" y="2894302"/>
+            <a:ext cx="5784525" cy="2885183"/>
+          </a:xfrm>
+          <a:prstGeom prst="rect">
+            <a:avLst/>
+          </a:prstGeom>
+          <a:solidFill>
+            <a:srgbClr val="919FA1"/>
+          </a:solidFill>
+          <a:ln>
+            <a:noFill/>
+          </a:ln>
+        </p:spPr>
+        <p:style>
+          <a:lnRef idx="2">
+            <a:schemeClr val="accent1">
+              <a:shade val="15000"/>
+            </a:schemeClr>
+          </a:lnRef>
+          <a:fillRef idx="1">
+            <a:schemeClr val="accent1"/>
+          </a:fillRef>
+          <a:effectRef idx="0">
+            <a:schemeClr val="accent1"/>
+          </a:effectRef>
+          <a:fontRef idx="minor">
+            <a:schemeClr val="lt1"/>
+          </a:fontRef>
+        </p:style>
+        <p:txBody>
+          <a:bodyPr rtlCol="0" anchor="ctr"/>
+          <a:lstStyle/>
+          <a:p>
+            <a:pPr algn="ctr"/>
+            <a:endParaRPr kumimoji="1" lang="ja-JP" altLang="en-US"/>
+          </a:p>
+        </p:txBody>
+      </p:sp>
+      <p:sp>
+        <p:nvSpPr>
+          <p:cNvPr id="1025" name="正方形/長方形 1024">
+            <a:extLst>
+              <a:ext uri="{FF2B5EF4-FFF2-40B4-BE49-F238E27FC236}">
+                <a16:creationId xmlns:a16="http://schemas.microsoft.com/office/drawing/2014/main" id="{2229DB02-E67B-1CBA-03A1-228668565B3E}"/>
+              </a:ext>
+            </a:extLst>
+          </p:cNvPr>
+          <p:cNvSpPr/>
+          <p:nvPr/>
+        </p:nvSpPr>
+        <p:spPr>
+          <a:xfrm>
+            <a:off x="330223" y="735754"/>
+            <a:ext cx="5784526" cy="2158548"/>
+          </a:xfrm>
+          <a:prstGeom prst="rect">
+            <a:avLst/>
+          </a:prstGeom>
+          <a:solidFill>
+            <a:srgbClr val="A5A7A6"/>
+          </a:solidFill>
+          <a:ln>
+            <a:noFill/>
+          </a:ln>
+        </p:spPr>
+        <p:style>
+          <a:lnRef idx="2">
+            <a:schemeClr val="accent1">
+              <a:shade val="15000"/>
+            </a:schemeClr>
+          </a:lnRef>
+          <a:fillRef idx="1">
+            <a:schemeClr val="accent1"/>
+          </a:fillRef>
+          <a:effectRef idx="0">
+            <a:schemeClr val="accent1"/>
+          </a:effectRef>
+          <a:fontRef idx="minor">
+            <a:schemeClr val="lt1"/>
+          </a:fontRef>
+        </p:style>
+        <p:txBody>
+          <a:bodyPr rtlCol="0" anchor="ctr"/>
+          <a:lstStyle/>
+          <a:p>
+            <a:pPr algn="ctr"/>
+            <a:endParaRPr kumimoji="1" lang="ja-JP" altLang="en-US"/>
+          </a:p>
+        </p:txBody>
+      </p:sp>
+      <p:cxnSp>
+        <p:nvCxnSpPr>
+          <p:cNvPr id="1027" name="直線コネクタ 1026">
+            <a:extLst>
+              <a:ext uri="{FF2B5EF4-FFF2-40B4-BE49-F238E27FC236}">
+                <a16:creationId xmlns:a16="http://schemas.microsoft.com/office/drawing/2014/main" id="{B0E2A71F-764B-13D4-4603-BAA4882E2C86}"/>
+              </a:ext>
+            </a:extLst>
+          </p:cNvPr>
+          <p:cNvCxnSpPr>
+            <a:cxnSpLocks/>
+          </p:cNvCxnSpPr>
+          <p:nvPr/>
+        </p:nvCxnSpPr>
+        <p:spPr>
+          <a:xfrm>
+            <a:off x="1789277" y="3092293"/>
+            <a:ext cx="0" cy="2819530"/>
+          </a:xfrm>
+          <a:prstGeom prst="line">
+            <a:avLst/>
+          </a:prstGeom>
+          <a:ln w="25400">
+            <a:solidFill>
+              <a:schemeClr val="tx1">
+                <a:lumMod val="75000"/>
+                <a:lumOff val="25000"/>
+                <a:alpha val="90000"/>
+              </a:schemeClr>
+            </a:solidFill>
+          </a:ln>
+        </p:spPr>
+        <p:style>
+          <a:lnRef idx="1">
+            <a:schemeClr val="accent1"/>
+          </a:lnRef>
+          <a:fillRef idx="0">
+            <a:schemeClr val="accent1"/>
+          </a:fillRef>
+          <a:effectRef idx="0">
+            <a:schemeClr val="accent1"/>
+          </a:effectRef>
+          <a:fontRef idx="minor">
+            <a:schemeClr val="tx1"/>
+          </a:fontRef>
+        </p:style>
+      </p:cxnSp>
+      <p:cxnSp>
+        <p:nvCxnSpPr>
+          <p:cNvPr id="1028" name="直線コネクタ 1027">
+            <a:extLst>
+              <a:ext uri="{FF2B5EF4-FFF2-40B4-BE49-F238E27FC236}">
+                <a16:creationId xmlns:a16="http://schemas.microsoft.com/office/drawing/2014/main" id="{6D14FDCD-E28D-6683-9EEE-C44C9F31BBE9}"/>
+              </a:ext>
+            </a:extLst>
+          </p:cNvPr>
+          <p:cNvCxnSpPr>
+            <a:cxnSpLocks/>
+          </p:cNvCxnSpPr>
+          <p:nvPr/>
+        </p:nvCxnSpPr>
+        <p:spPr>
+          <a:xfrm>
+            <a:off x="3222486" y="3086618"/>
+            <a:ext cx="3243" cy="2825205"/>
+          </a:xfrm>
+          <a:prstGeom prst="line">
+            <a:avLst/>
+          </a:prstGeom>
+          <a:ln w="25400">
+            <a:solidFill>
+              <a:schemeClr val="tx1">
+                <a:lumMod val="85000"/>
+                <a:lumOff val="15000"/>
+                <a:alpha val="90000"/>
+              </a:schemeClr>
+            </a:solidFill>
+          </a:ln>
+        </p:spPr>
+        <p:style>
+          <a:lnRef idx="1">
+            <a:schemeClr val="accent1"/>
+          </a:lnRef>
+          <a:fillRef idx="0">
+            <a:schemeClr val="accent1"/>
+          </a:fillRef>
+          <a:effectRef idx="0">
+            <a:schemeClr val="accent1"/>
+          </a:effectRef>
+          <a:fontRef idx="minor">
+            <a:schemeClr val="tx1"/>
+          </a:fontRef>
+        </p:style>
+      </p:cxnSp>
+      <p:cxnSp>
+        <p:nvCxnSpPr>
+          <p:cNvPr id="1029" name="直線コネクタ 1028">
+            <a:extLst>
+              <a:ext uri="{FF2B5EF4-FFF2-40B4-BE49-F238E27FC236}">
+                <a16:creationId xmlns:a16="http://schemas.microsoft.com/office/drawing/2014/main" id="{B60F1D29-FDD9-A106-97A4-06A54682323B}"/>
+              </a:ext>
+            </a:extLst>
+          </p:cNvPr>
+          <p:cNvCxnSpPr>
+            <a:cxnSpLocks/>
+          </p:cNvCxnSpPr>
+          <p:nvPr/>
+        </p:nvCxnSpPr>
+        <p:spPr>
+          <a:xfrm>
+            <a:off x="4678392" y="3086617"/>
+            <a:ext cx="0" cy="2825206"/>
+          </a:xfrm>
+          <a:prstGeom prst="line">
+            <a:avLst/>
+          </a:prstGeom>
+          <a:ln w="25400">
+            <a:solidFill>
+              <a:schemeClr val="tx1">
+                <a:lumMod val="85000"/>
+                <a:lumOff val="15000"/>
+                <a:alpha val="90000"/>
+              </a:schemeClr>
+            </a:solidFill>
+          </a:ln>
+        </p:spPr>
+        <p:style>
+          <a:lnRef idx="1">
+            <a:schemeClr val="accent1"/>
+          </a:lnRef>
+          <a:fillRef idx="0">
+            <a:schemeClr val="accent1"/>
+          </a:fillRef>
+          <a:effectRef idx="0">
+            <a:schemeClr val="accent1"/>
+          </a:effectRef>
+          <a:fontRef idx="minor">
+            <a:schemeClr val="tx1"/>
+          </a:fontRef>
+        </p:style>
+      </p:cxnSp>
+      <p:cxnSp>
+        <p:nvCxnSpPr>
+          <p:cNvPr id="1030" name="直線コネクタ 1029">
+            <a:extLst>
+              <a:ext uri="{FF2B5EF4-FFF2-40B4-BE49-F238E27FC236}">
+                <a16:creationId xmlns:a16="http://schemas.microsoft.com/office/drawing/2014/main" id="{2F13C363-F614-C765-60E7-747568840C2A}"/>
+              </a:ext>
+            </a:extLst>
+          </p:cNvPr>
+          <p:cNvCxnSpPr>
+            <a:cxnSpLocks/>
+          </p:cNvCxnSpPr>
+          <p:nvPr/>
+        </p:nvCxnSpPr>
+        <p:spPr>
+          <a:xfrm>
+            <a:off x="6095388" y="679423"/>
+            <a:ext cx="0" cy="5100062"/>
+          </a:xfrm>
+          <a:prstGeom prst="line">
+            <a:avLst/>
+          </a:prstGeom>
+          <a:ln w="25400">
+            <a:solidFill>
+              <a:schemeClr val="tx1">
+                <a:lumMod val="85000"/>
+                <a:lumOff val="15000"/>
+              </a:schemeClr>
+            </a:solidFill>
+          </a:ln>
+        </p:spPr>
+        <p:style>
+          <a:lnRef idx="1">
+            <a:schemeClr val="accent1"/>
+          </a:lnRef>
+          <a:fillRef idx="0">
+            <a:schemeClr val="accent1"/>
+          </a:fillRef>
+          <a:effectRef idx="0">
+            <a:schemeClr val="accent1"/>
+          </a:effectRef>
+          <a:fontRef idx="minor">
+            <a:schemeClr val="tx1"/>
+          </a:fontRef>
+        </p:style>
+      </p:cxnSp>
+      <p:cxnSp>
+        <p:nvCxnSpPr>
+          <p:cNvPr id="1031" name="直線コネクタ 1030">
+            <a:extLst>
+              <a:ext uri="{FF2B5EF4-FFF2-40B4-BE49-F238E27FC236}">
+                <a16:creationId xmlns:a16="http://schemas.microsoft.com/office/drawing/2014/main" id="{06B12000-556C-9355-A48F-03CA1D16245F}"/>
+              </a:ext>
+            </a:extLst>
+          </p:cNvPr>
+          <p:cNvCxnSpPr>
+            <a:cxnSpLocks/>
+          </p:cNvCxnSpPr>
+          <p:nvPr/>
+        </p:nvCxnSpPr>
+        <p:spPr>
+          <a:xfrm>
+            <a:off x="230927" y="4327167"/>
+            <a:ext cx="6040123" cy="0"/>
+          </a:xfrm>
+          <a:prstGeom prst="line">
+            <a:avLst/>
+          </a:prstGeom>
+          <a:ln w="25400">
+            <a:solidFill>
+              <a:schemeClr val="tx1">
+                <a:lumMod val="85000"/>
+                <a:lumOff val="15000"/>
+                <a:alpha val="90000"/>
+              </a:schemeClr>
+            </a:solidFill>
+          </a:ln>
+        </p:spPr>
+        <p:style>
+          <a:lnRef idx="1">
+            <a:schemeClr val="accent1"/>
+          </a:lnRef>
+          <a:fillRef idx="0">
+            <a:schemeClr val="accent1"/>
+          </a:fillRef>
+          <a:effectRef idx="0">
+            <a:schemeClr val="accent1"/>
+          </a:effectRef>
+          <a:fontRef idx="minor">
+            <a:schemeClr val="tx1"/>
+          </a:fontRef>
+        </p:style>
+      </p:cxnSp>
+      <p:sp>
+        <p:nvSpPr>
+          <p:cNvPr id="1032" name="正方形/長方形 1031">
+            <a:extLst>
+              <a:ext uri="{FF2B5EF4-FFF2-40B4-BE49-F238E27FC236}">
+                <a16:creationId xmlns:a16="http://schemas.microsoft.com/office/drawing/2014/main" id="{5CA13275-F871-ED52-A470-77C3603D1467}"/>
+              </a:ext>
+            </a:extLst>
+          </p:cNvPr>
+          <p:cNvSpPr/>
+          <p:nvPr/>
+        </p:nvSpPr>
+        <p:spPr>
+          <a:xfrm>
+            <a:off x="1714926" y="1028322"/>
+            <a:ext cx="148702" cy="1568992"/>
+          </a:xfrm>
+          <a:prstGeom prst="rect">
+            <a:avLst/>
+          </a:prstGeom>
+          <a:solidFill>
+            <a:srgbClr val="BEBFC3">
+              <a:alpha val="20000"/>
+            </a:srgbClr>
+          </a:solidFill>
+          <a:ln>
+            <a:noFill/>
+          </a:ln>
+          <a:effectLst>
+            <a:glow rad="254000">
+              <a:srgbClr val="BEBFC3">
+                <a:alpha val="60000"/>
+              </a:srgbClr>
+            </a:glow>
+          </a:effectLst>
+        </p:spPr>
+        <p:style>
+          <a:lnRef idx="2">
+            <a:schemeClr val="accent1">
+              <a:shade val="15000"/>
+            </a:schemeClr>
+          </a:lnRef>
+          <a:fillRef idx="1">
+            <a:schemeClr val="accent1"/>
+          </a:fillRef>
+          <a:effectRef idx="0">
+            <a:schemeClr val="accent1"/>
+          </a:effectRef>
+          <a:fontRef idx="minor">
+            <a:schemeClr val="lt1"/>
+          </a:fontRef>
+        </p:style>
+        <p:txBody>
+          <a:bodyPr rtlCol="0" anchor="ctr"/>
+          <a:lstStyle/>
+          <a:p>
+            <a:pPr algn="ctr"/>
+            <a:endParaRPr kumimoji="1" lang="ja-JP" altLang="en-US"/>
+          </a:p>
+        </p:txBody>
+      </p:sp>
+      <p:sp>
+        <p:nvSpPr>
+          <p:cNvPr id="1033" name="正方形/長方形 1032">
+            <a:extLst>
+              <a:ext uri="{FF2B5EF4-FFF2-40B4-BE49-F238E27FC236}">
+                <a16:creationId xmlns:a16="http://schemas.microsoft.com/office/drawing/2014/main" id="{487E3B21-3095-6A95-BD45-3C65CF3CA1A3}"/>
+              </a:ext>
+            </a:extLst>
+          </p:cNvPr>
+          <p:cNvSpPr/>
+          <p:nvPr/>
+        </p:nvSpPr>
+        <p:spPr>
+          <a:xfrm>
+            <a:off x="4587827" y="1028321"/>
+            <a:ext cx="148702" cy="1593145"/>
+          </a:xfrm>
+          <a:prstGeom prst="rect">
+            <a:avLst/>
+          </a:prstGeom>
+          <a:solidFill>
+            <a:srgbClr val="BEBFC3">
+              <a:alpha val="20000"/>
+            </a:srgbClr>
+          </a:solidFill>
+          <a:ln>
+            <a:noFill/>
+          </a:ln>
+          <a:effectLst>
+            <a:glow rad="127000">
+              <a:srgbClr val="BEBFC3">
+                <a:alpha val="60000"/>
+              </a:srgbClr>
+            </a:glow>
+          </a:effectLst>
+        </p:spPr>
+        <p:style>
+          <a:lnRef idx="2">
+            <a:schemeClr val="accent1">
+              <a:shade val="15000"/>
+            </a:schemeClr>
+          </a:lnRef>
+          <a:fillRef idx="1">
+            <a:schemeClr val="accent1"/>
+          </a:fillRef>
+          <a:effectRef idx="0">
+            <a:schemeClr val="accent1"/>
+          </a:effectRef>
+          <a:fontRef idx="minor">
+            <a:schemeClr val="lt1"/>
+          </a:fontRef>
+        </p:style>
+        <p:txBody>
+          <a:bodyPr rtlCol="0" anchor="ctr"/>
+          <a:lstStyle/>
+          <a:p>
+            <a:pPr algn="ctr"/>
+            <a:endParaRPr kumimoji="1" lang="ja-JP" altLang="en-US"/>
+          </a:p>
+        </p:txBody>
+      </p:sp>
+      <p:pic>
+        <p:nvPicPr>
+          <p:cNvPr id="1034" name="図 1033">
+            <a:extLst>
+              <a:ext uri="{FF2B5EF4-FFF2-40B4-BE49-F238E27FC236}">
+                <a16:creationId xmlns:a16="http://schemas.microsoft.com/office/drawing/2014/main" id="{1395EC2C-8CAD-3E76-9273-495DA36824C2}"/>
+              </a:ext>
+            </a:extLst>
+          </p:cNvPr>
+          <p:cNvPicPr>
+            <a:picLocks noChangeAspect="1"/>
+          </p:cNvPicPr>
+          <p:nvPr/>
+        </p:nvPicPr>
+        <p:blipFill>
+          <a:blip r:embed="rId2">
+            <a:extLst>
+              <a:ext uri="{BEBA8EAE-BF5A-486C-A8C5-ECC9F3942E4B}">
+                <a14:imgProps xmlns:a14="http://schemas.microsoft.com/office/drawing/2010/main">
+                  <a14:imgLayer r:embed="rId3">
+                    <a14:imgEffect>
+                      <a14:sharpenSoften amount="48000"/>
+                    </a14:imgEffect>
+                    <a14:imgEffect>
+                      <a14:brightnessContrast bright="24000"/>
+                    </a14:imgEffect>
+                  </a14:imgLayer>
+                </a14:imgProps>
+              </a:ext>
+              <a:ext uri="{28A0092B-C50C-407E-A947-70E740481C1C}">
+                <a14:useLocalDpi xmlns:a14="http://schemas.microsoft.com/office/drawing/2010/main" val="0"/>
+              </a:ext>
+            </a:extLst>
+          </a:blip>
+          <a:stretch>
+            <a:fillRect/>
+          </a:stretch>
+        </p:blipFill>
+        <p:spPr>
+          <a:xfrm>
+            <a:off x="312992" y="679423"/>
+            <a:ext cx="2915975" cy="1992735"/>
+          </a:xfrm>
+          <a:prstGeom prst="rect">
+            <a:avLst/>
+          </a:prstGeom>
+        </p:spPr>
+      </p:pic>
+      <p:pic>
+        <p:nvPicPr>
+          <p:cNvPr id="1035" name="図 1034">
+            <a:extLst>
+              <a:ext uri="{FF2B5EF4-FFF2-40B4-BE49-F238E27FC236}">
+                <a16:creationId xmlns:a16="http://schemas.microsoft.com/office/drawing/2014/main" id="{7A2190E7-1D3D-908B-72B3-2DB834289D90}"/>
+              </a:ext>
+            </a:extLst>
+          </p:cNvPr>
+          <p:cNvPicPr>
+            <a:picLocks noChangeAspect="1"/>
+          </p:cNvPicPr>
+          <p:nvPr/>
+        </p:nvPicPr>
+        <p:blipFill>
+          <a:blip r:embed="rId2">
+            <a:extLst>
+              <a:ext uri="{BEBA8EAE-BF5A-486C-A8C5-ECC9F3942E4B}">
+                <a14:imgProps xmlns:a14="http://schemas.microsoft.com/office/drawing/2010/main">
+                  <a14:imgLayer r:embed="rId3">
+                    <a14:imgEffect>
+                      <a14:sharpenSoften amount="48000"/>
+                    </a14:imgEffect>
+                    <a14:imgEffect>
+                      <a14:brightnessContrast bright="24000"/>
+                    </a14:imgEffect>
+                  </a14:imgLayer>
+                </a14:imgProps>
+              </a:ext>
+              <a:ext uri="{28A0092B-C50C-407E-A947-70E740481C1C}">
+                <a14:useLocalDpi xmlns:a14="http://schemas.microsoft.com/office/drawing/2010/main" val="0"/>
+              </a:ext>
+            </a:extLst>
+          </a:blip>
+          <a:stretch>
+            <a:fillRect/>
+          </a:stretch>
+        </p:blipFill>
+        <p:spPr>
+          <a:xfrm flipH="1">
+            <a:off x="3220357" y="679422"/>
+            <a:ext cx="2911623" cy="1992735"/>
+          </a:xfrm>
+          <a:prstGeom prst="rect">
+            <a:avLst/>
+          </a:prstGeom>
+        </p:spPr>
+      </p:pic>
+      <p:sp>
+        <p:nvSpPr>
+          <p:cNvPr id="1036" name="正方形/長方形 1035">
+            <a:extLst>
+              <a:ext uri="{FF2B5EF4-FFF2-40B4-BE49-F238E27FC236}">
+                <a16:creationId xmlns:a16="http://schemas.microsoft.com/office/drawing/2014/main" id="{BF6A27BD-1515-A52C-F284-C97E7C56C562}"/>
+              </a:ext>
+            </a:extLst>
+          </p:cNvPr>
+          <p:cNvSpPr/>
+          <p:nvPr/>
+        </p:nvSpPr>
+        <p:spPr>
+          <a:xfrm>
+            <a:off x="227118" y="3071343"/>
+            <a:ext cx="5897808" cy="81832"/>
+          </a:xfrm>
+          <a:prstGeom prst="rect">
+            <a:avLst/>
+          </a:prstGeom>
+          <a:gradFill>
+            <a:gsLst>
+              <a:gs pos="0">
+                <a:schemeClr val="tx1">
+                  <a:lumMod val="100000"/>
+                </a:schemeClr>
+              </a:gs>
+              <a:gs pos="100000">
+                <a:schemeClr val="tx1">
+                  <a:lumMod val="85000"/>
+                  <a:lumOff val="15000"/>
+                  <a:alpha val="0"/>
+                </a:schemeClr>
+              </a:gs>
+            </a:gsLst>
+            <a:lin ang="5400000" scaled="1"/>
+          </a:gradFill>
+          <a:ln w="31750">
+            <a:noFill/>
+          </a:ln>
+        </p:spPr>
+        <p:style>
+          <a:lnRef idx="2">
+            <a:schemeClr val="accent1">
+              <a:shade val="15000"/>
+            </a:schemeClr>
+          </a:lnRef>
+          <a:fillRef idx="1">
+            <a:schemeClr val="accent1"/>
+          </a:fillRef>
+          <a:effectRef idx="0">
+            <a:schemeClr val="accent1"/>
+          </a:effectRef>
+          <a:fontRef idx="minor">
+            <a:schemeClr val="lt1"/>
+          </a:fontRef>
+        </p:style>
+        <p:txBody>
+          <a:bodyPr rtlCol="0" anchor="ctr"/>
+          <a:lstStyle/>
+          <a:p>
+            <a:pPr algn="ctr"/>
+            <a:endParaRPr kumimoji="1" lang="ja-JP" altLang="en-US"/>
+          </a:p>
+        </p:txBody>
+      </p:sp>
+      <p:sp>
+        <p:nvSpPr>
+          <p:cNvPr id="1037" name="正方形/長方形 1036">
+            <a:extLst>
+              <a:ext uri="{FF2B5EF4-FFF2-40B4-BE49-F238E27FC236}">
+                <a16:creationId xmlns:a16="http://schemas.microsoft.com/office/drawing/2014/main" id="{E4CB871B-57A6-9993-A032-2FE2FAF71859}"/>
+              </a:ext>
+            </a:extLst>
+          </p:cNvPr>
+          <p:cNvSpPr/>
+          <p:nvPr/>
+        </p:nvSpPr>
+        <p:spPr>
+          <a:xfrm>
+            <a:off x="230928" y="2673455"/>
+            <a:ext cx="11747987" cy="395983"/>
+          </a:xfrm>
+          <a:prstGeom prst="rect">
+            <a:avLst/>
+          </a:prstGeom>
+          <a:solidFill>
+            <a:srgbClr val="98999E"/>
+          </a:solidFill>
+          <a:ln w="31750">
+            <a:noFill/>
+          </a:ln>
+        </p:spPr>
+        <p:style>
+          <a:lnRef idx="2">
+            <a:schemeClr val="accent1">
+              <a:shade val="15000"/>
+            </a:schemeClr>
+          </a:lnRef>
+          <a:fillRef idx="1">
+            <a:schemeClr val="accent1"/>
+          </a:fillRef>
+          <a:effectRef idx="0">
+            <a:schemeClr val="accent1"/>
+          </a:effectRef>
+          <a:fontRef idx="minor">
+            <a:schemeClr val="lt1"/>
+          </a:fontRef>
+        </p:style>
+        <p:txBody>
+          <a:bodyPr rtlCol="0" anchor="ctr"/>
+          <a:lstStyle/>
+          <a:p>
+            <a:pPr algn="ctr"/>
+            <a:endParaRPr kumimoji="1" lang="ja-JP" altLang="en-US"/>
+          </a:p>
+        </p:txBody>
+      </p:sp>
+      <p:pic>
+        <p:nvPicPr>
+          <p:cNvPr id="1038" name="図 1037">
+            <a:extLst>
+              <a:ext uri="{FF2B5EF4-FFF2-40B4-BE49-F238E27FC236}">
+                <a16:creationId xmlns:a16="http://schemas.microsoft.com/office/drawing/2014/main" id="{791425E8-996A-90E3-058C-47C18921D2A3}"/>
+              </a:ext>
+            </a:extLst>
+          </p:cNvPr>
+          <p:cNvPicPr>
+            <a:picLocks noChangeAspect="1"/>
+          </p:cNvPicPr>
+          <p:nvPr/>
+        </p:nvPicPr>
+        <p:blipFill>
+          <a:blip r:embed="rId4">
+            <a:extLst>
+              <a:ext uri="{28A0092B-C50C-407E-A947-70E740481C1C}">
+                <a14:useLocalDpi xmlns:a14="http://schemas.microsoft.com/office/drawing/2010/main" val="0"/>
+              </a:ext>
+            </a:extLst>
+          </a:blip>
+          <a:stretch>
+            <a:fillRect/>
+          </a:stretch>
+        </p:blipFill>
+        <p:spPr>
+          <a:xfrm>
+            <a:off x="2115756" y="2730914"/>
+            <a:ext cx="2270464" cy="281063"/>
+          </a:xfrm>
+          <a:prstGeom prst="rect">
+            <a:avLst/>
+          </a:prstGeom>
+        </p:spPr>
+      </p:pic>
+      <p:pic>
+        <p:nvPicPr>
+          <p:cNvPr id="31" name="図 30">
+            <a:extLst>
+              <a:ext uri="{FF2B5EF4-FFF2-40B4-BE49-F238E27FC236}">
+                <a16:creationId xmlns:a16="http://schemas.microsoft.com/office/drawing/2014/main" id="{2069C22F-0D3A-65D2-9B20-251DE909FD5C}"/>
+              </a:ext>
+            </a:extLst>
+          </p:cNvPr>
+          <p:cNvPicPr>
+            <a:picLocks noChangeAspect="1"/>
+          </p:cNvPicPr>
+          <p:nvPr/>
+        </p:nvPicPr>
+        <p:blipFill>
+          <a:blip r:embed="rId5"/>
+          <a:stretch>
+            <a:fillRect/>
+          </a:stretch>
+        </p:blipFill>
+        <p:spPr>
+          <a:xfrm>
+            <a:off x="6365459" y="2748299"/>
+            <a:ext cx="603874" cy="233758"/>
           </a:xfrm>
           <a:prstGeom prst="rect">
             <a:avLst/>
@@ -7451,7 +8433,7 @@
     </p:spTree>
     <p:extLst>
       <p:ext uri="{BB962C8B-B14F-4D97-AF65-F5344CB8AC3E}">
-        <p14:creationId xmlns:p14="http://schemas.microsoft.com/office/powerpoint/2010/main" val="3824164978"/>
+        <p14:creationId xmlns:p14="http://schemas.microsoft.com/office/powerpoint/2010/main" val="2302734688"/>
       </p:ext>
     </p:extLst>
   </p:cSld>
@@ -7467,7 +8449,7 @@
     <p:bg>
       <p:bgPr>
         <a:solidFill>
-          <a:srgbClr val="FF00FF"/>
+          <a:schemeClr val="tx1"/>
         </a:solidFill>
         <a:effectLst/>
       </p:bgPr>
@@ -7486,48 +8468,12 @@
           <a:chExt cx="0" cy="0"/>
         </a:xfrm>
       </p:grpSpPr>
-      <p:pic>
-        <p:nvPicPr>
-          <p:cNvPr id="5" name="図 4">
-            <a:extLst>
-              <a:ext uri="{FF2B5EF4-FFF2-40B4-BE49-F238E27FC236}">
-                <a16:creationId xmlns:a16="http://schemas.microsoft.com/office/drawing/2014/main" id="{426268CA-F4A0-F713-DF5A-1B9F8E3F46AB}"/>
-              </a:ext>
-            </a:extLst>
-          </p:cNvPr>
-          <p:cNvPicPr>
-            <a:picLocks noChangeAspect="1"/>
-          </p:cNvPicPr>
-          <p:nvPr/>
-        </p:nvPicPr>
-        <p:blipFill>
-          <a:blip r:embed="rId2">
-            <a:extLst>
-              <a:ext uri="{28A0092B-C50C-407E-A947-70E740481C1C}">
-                <a14:useLocalDpi xmlns:a14="http://schemas.microsoft.com/office/drawing/2010/main" val="0"/>
-              </a:ext>
-            </a:extLst>
-          </a:blip>
-          <a:stretch>
-            <a:fillRect/>
-          </a:stretch>
-        </p:blipFill>
-        <p:spPr>
-          <a:xfrm>
-            <a:off x="233464" y="154471"/>
-            <a:ext cx="11444412" cy="2861103"/>
-          </a:xfrm>
-          <a:prstGeom prst="rect">
-            <a:avLst/>
-          </a:prstGeom>
-        </p:spPr>
-      </p:pic>
-      <p:sp>
-        <p:nvSpPr>
-          <p:cNvPr id="6" name="正方形/長方形 5">
-            <a:extLst>
-              <a:ext uri="{FF2B5EF4-FFF2-40B4-BE49-F238E27FC236}">
-                <a16:creationId xmlns:a16="http://schemas.microsoft.com/office/drawing/2014/main" id="{DC468BBB-5D39-B394-3177-16992010CB30}"/>
+      <p:sp>
+        <p:nvSpPr>
+          <p:cNvPr id="4" name="正方形/長方形 3">
+            <a:extLst>
+              <a:ext uri="{FF2B5EF4-FFF2-40B4-BE49-F238E27FC236}">
+                <a16:creationId xmlns:a16="http://schemas.microsoft.com/office/drawing/2014/main" id="{2F5253A5-12DF-EDA1-33CF-ABDDB098F11C}"/>
               </a:ext>
             </a:extLst>
           </p:cNvPr>
@@ -7536,28 +8482,25 @@
         </p:nvSpPr>
         <p:spPr>
           <a:xfrm>
-            <a:off x="3433862" y="2715188"/>
-            <a:ext cx="4679006" cy="3988341"/>
+            <a:off x="6205682" y="2945751"/>
+            <a:ext cx="5784525" cy="2885183"/>
           </a:xfrm>
           <a:prstGeom prst="rect">
             <a:avLst/>
           </a:prstGeom>
           <a:gradFill>
             <a:gsLst>
-              <a:gs pos="70000">
-                <a:srgbClr val="585A5E"/>
+              <a:gs pos="0">
+                <a:srgbClr val="7D8383"/>
               </a:gs>
-              <a:gs pos="0">
-                <a:srgbClr val="8A8572"/>
-              </a:gs>
-              <a:gs pos="39000">
-                <a:srgbClr val="464646"/>
+              <a:gs pos="47000">
+                <a:srgbClr val="757B79"/>
               </a:gs>
               <a:gs pos="100000">
-                <a:srgbClr val="81776B"/>
+                <a:srgbClr val="717777"/>
               </a:gs>
             </a:gsLst>
-            <a:lin ang="0" scaled="0"/>
+            <a:lin ang="5400000" scaled="1"/>
           </a:gradFill>
           <a:ln>
             <a:noFill/>
@@ -7588,10 +8531,644 @@
           </a:p>
         </p:txBody>
       </p:sp>
+      <p:sp>
+        <p:nvSpPr>
+          <p:cNvPr id="6" name="正方形/長方形 5">
+            <a:extLst>
+              <a:ext uri="{FF2B5EF4-FFF2-40B4-BE49-F238E27FC236}">
+                <a16:creationId xmlns:a16="http://schemas.microsoft.com/office/drawing/2014/main" id="{2F73EC64-4F63-59A5-75DF-1B4FF772CEF1}"/>
+              </a:ext>
+            </a:extLst>
+          </p:cNvPr>
+          <p:cNvSpPr/>
+          <p:nvPr/>
+        </p:nvSpPr>
+        <p:spPr>
+          <a:xfrm>
+            <a:off x="-234064" y="3791729"/>
+            <a:ext cx="5784526" cy="2158548"/>
+          </a:xfrm>
+          <a:prstGeom prst="rect">
+            <a:avLst/>
+          </a:prstGeom>
+          <a:solidFill>
+            <a:srgbClr val="A5A7A6"/>
+          </a:solidFill>
+          <a:ln>
+            <a:noFill/>
+          </a:ln>
+        </p:spPr>
+        <p:style>
+          <a:lnRef idx="2">
+            <a:schemeClr val="accent1">
+              <a:shade val="15000"/>
+            </a:schemeClr>
+          </a:lnRef>
+          <a:fillRef idx="1">
+            <a:schemeClr val="accent1"/>
+          </a:fillRef>
+          <a:effectRef idx="0">
+            <a:schemeClr val="accent1"/>
+          </a:effectRef>
+          <a:fontRef idx="minor">
+            <a:schemeClr val="lt1"/>
+          </a:fontRef>
+        </p:style>
+        <p:txBody>
+          <a:bodyPr rtlCol="0" anchor="ctr"/>
+          <a:lstStyle/>
+          <a:p>
+            <a:pPr algn="ctr"/>
+            <a:endParaRPr kumimoji="1" lang="ja-JP" altLang="en-US"/>
+          </a:p>
+        </p:txBody>
+      </p:sp>
+      <p:sp>
+        <p:nvSpPr>
+          <p:cNvPr id="5" name="正方形/長方形 4">
+            <a:extLst>
+              <a:ext uri="{FF2B5EF4-FFF2-40B4-BE49-F238E27FC236}">
+                <a16:creationId xmlns:a16="http://schemas.microsoft.com/office/drawing/2014/main" id="{FE3ECDA9-8C8D-00AA-3DB4-C34D34A6C11A}"/>
+              </a:ext>
+            </a:extLst>
+          </p:cNvPr>
+          <p:cNvSpPr/>
+          <p:nvPr/>
+        </p:nvSpPr>
+        <p:spPr>
+          <a:xfrm>
+            <a:off x="6096000" y="2747759"/>
+            <a:ext cx="5964980" cy="395983"/>
+          </a:xfrm>
+          <a:prstGeom prst="rect">
+            <a:avLst/>
+          </a:prstGeom>
+          <a:solidFill>
+            <a:srgbClr val="626061"/>
+          </a:solidFill>
+          <a:ln w="31750">
+            <a:solidFill>
+              <a:schemeClr val="tx1"/>
+            </a:solidFill>
+          </a:ln>
+        </p:spPr>
+        <p:style>
+          <a:lnRef idx="2">
+            <a:schemeClr val="accent1">
+              <a:shade val="15000"/>
+            </a:schemeClr>
+          </a:lnRef>
+          <a:fillRef idx="1">
+            <a:schemeClr val="accent1"/>
+          </a:fillRef>
+          <a:effectRef idx="0">
+            <a:schemeClr val="accent1"/>
+          </a:effectRef>
+          <a:fontRef idx="minor">
+            <a:schemeClr val="lt1"/>
+          </a:fontRef>
+        </p:style>
+        <p:txBody>
+          <a:bodyPr rtlCol="0" anchor="ctr"/>
+          <a:lstStyle/>
+          <a:p>
+            <a:pPr algn="ctr"/>
+            <a:endParaRPr kumimoji="1" lang="ja-JP" altLang="en-US"/>
+          </a:p>
+        </p:txBody>
+      </p:sp>
+      <p:pic>
+        <p:nvPicPr>
+          <p:cNvPr id="1026" name="Picture 2">
+            <a:extLst>
+              <a:ext uri="{FF2B5EF4-FFF2-40B4-BE49-F238E27FC236}">
+                <a16:creationId xmlns:a16="http://schemas.microsoft.com/office/drawing/2014/main" id="{FBBB064D-89CA-9A59-4999-6ACEDDFDCCA3}"/>
+              </a:ext>
+            </a:extLst>
+          </p:cNvPr>
+          <p:cNvPicPr>
+            <a:picLocks noChangeAspect="1" noChangeArrowheads="1"/>
+          </p:cNvPicPr>
+          <p:nvPr/>
+        </p:nvPicPr>
+        <p:blipFill rotWithShape="1">
+          <a:blip r:embed="rId2">
+            <a:extLst>
+              <a:ext uri="{28A0092B-C50C-407E-A947-70E740481C1C}">
+                <a14:useLocalDpi xmlns:a14="http://schemas.microsoft.com/office/drawing/2010/main" val="0"/>
+              </a:ext>
+            </a:extLst>
+          </a:blip>
+          <a:srcRect r="50873"/>
+          <a:stretch/>
+        </p:blipFill>
+        <p:spPr bwMode="auto">
+          <a:xfrm>
+            <a:off x="-155393" y="0"/>
+            <a:ext cx="1946602" cy="3429000"/>
+          </a:xfrm>
+          <a:prstGeom prst="rect">
+            <a:avLst/>
+          </a:prstGeom>
+          <a:noFill/>
+          <a:extLst>
+            <a:ext uri="{909E8E84-426E-40DD-AFC4-6F175D3DCCD1}">
+              <a14:hiddenFill xmlns:a14="http://schemas.microsoft.com/office/drawing/2010/main">
+                <a:solidFill>
+                  <a:srgbClr val="FFFFFF"/>
+                </a:solidFill>
+              </a14:hiddenFill>
+            </a:ext>
+          </a:extLst>
+        </p:spPr>
+      </p:pic>
+      <p:cxnSp>
+        <p:nvCxnSpPr>
+          <p:cNvPr id="8" name="直線コネクタ 7">
+            <a:extLst>
+              <a:ext uri="{FF2B5EF4-FFF2-40B4-BE49-F238E27FC236}">
+                <a16:creationId xmlns:a16="http://schemas.microsoft.com/office/drawing/2014/main" id="{D3105DBF-276D-3295-8405-BDD9A360A5BE}"/>
+              </a:ext>
+            </a:extLst>
+          </p:cNvPr>
+          <p:cNvCxnSpPr>
+            <a:cxnSpLocks/>
+          </p:cNvCxnSpPr>
+          <p:nvPr/>
+        </p:nvCxnSpPr>
+        <p:spPr>
+          <a:xfrm>
+            <a:off x="7654349" y="3143742"/>
+            <a:ext cx="0" cy="2819530"/>
+          </a:xfrm>
+          <a:prstGeom prst="line">
+            <a:avLst/>
+          </a:prstGeom>
+          <a:ln w="25400">
+            <a:solidFill>
+              <a:schemeClr val="tx1">
+                <a:lumMod val="85000"/>
+                <a:lumOff val="15000"/>
+              </a:schemeClr>
+            </a:solidFill>
+          </a:ln>
+        </p:spPr>
+        <p:style>
+          <a:lnRef idx="1">
+            <a:schemeClr val="accent1"/>
+          </a:lnRef>
+          <a:fillRef idx="0">
+            <a:schemeClr val="accent1"/>
+          </a:fillRef>
+          <a:effectRef idx="0">
+            <a:schemeClr val="accent1"/>
+          </a:effectRef>
+          <a:fontRef idx="minor">
+            <a:schemeClr val="tx1"/>
+          </a:fontRef>
+        </p:style>
+      </p:cxnSp>
+      <p:cxnSp>
+        <p:nvCxnSpPr>
+          <p:cNvPr id="9" name="直線コネクタ 8">
+            <a:extLst>
+              <a:ext uri="{FF2B5EF4-FFF2-40B4-BE49-F238E27FC236}">
+                <a16:creationId xmlns:a16="http://schemas.microsoft.com/office/drawing/2014/main" id="{53FE7450-22FF-A8E1-4BCE-587A78B780C8}"/>
+              </a:ext>
+            </a:extLst>
+          </p:cNvPr>
+          <p:cNvCxnSpPr>
+            <a:cxnSpLocks/>
+          </p:cNvCxnSpPr>
+          <p:nvPr/>
+        </p:nvCxnSpPr>
+        <p:spPr>
+          <a:xfrm>
+            <a:off x="9087558" y="3138067"/>
+            <a:ext cx="3243" cy="2825205"/>
+          </a:xfrm>
+          <a:prstGeom prst="line">
+            <a:avLst/>
+          </a:prstGeom>
+          <a:ln w="25400">
+            <a:solidFill>
+              <a:schemeClr val="tx1">
+                <a:lumMod val="85000"/>
+                <a:lumOff val="15000"/>
+              </a:schemeClr>
+            </a:solidFill>
+          </a:ln>
+        </p:spPr>
+        <p:style>
+          <a:lnRef idx="1">
+            <a:schemeClr val="accent1"/>
+          </a:lnRef>
+          <a:fillRef idx="0">
+            <a:schemeClr val="accent1"/>
+          </a:fillRef>
+          <a:effectRef idx="0">
+            <a:schemeClr val="accent1"/>
+          </a:effectRef>
+          <a:fontRef idx="minor">
+            <a:schemeClr val="tx1"/>
+          </a:fontRef>
+        </p:style>
+      </p:cxnSp>
+      <p:cxnSp>
+        <p:nvCxnSpPr>
+          <p:cNvPr id="10" name="直線コネクタ 9">
+            <a:extLst>
+              <a:ext uri="{FF2B5EF4-FFF2-40B4-BE49-F238E27FC236}">
+                <a16:creationId xmlns:a16="http://schemas.microsoft.com/office/drawing/2014/main" id="{88B2AD6D-E2A5-6CC9-BC37-85DA78E7C89F}"/>
+              </a:ext>
+            </a:extLst>
+          </p:cNvPr>
+          <p:cNvCxnSpPr>
+            <a:cxnSpLocks/>
+          </p:cNvCxnSpPr>
+          <p:nvPr/>
+        </p:nvCxnSpPr>
+        <p:spPr>
+          <a:xfrm>
+            <a:off x="10543464" y="3138066"/>
+            <a:ext cx="0" cy="2825206"/>
+          </a:xfrm>
+          <a:prstGeom prst="line">
+            <a:avLst/>
+          </a:prstGeom>
+          <a:ln w="25400">
+            <a:solidFill>
+              <a:schemeClr val="tx1">
+                <a:lumMod val="85000"/>
+                <a:lumOff val="15000"/>
+              </a:schemeClr>
+            </a:solidFill>
+          </a:ln>
+        </p:spPr>
+        <p:style>
+          <a:lnRef idx="1">
+            <a:schemeClr val="accent1"/>
+          </a:lnRef>
+          <a:fillRef idx="0">
+            <a:schemeClr val="accent1"/>
+          </a:fillRef>
+          <a:effectRef idx="0">
+            <a:schemeClr val="accent1"/>
+          </a:effectRef>
+          <a:fontRef idx="minor">
+            <a:schemeClr val="tx1"/>
+          </a:fontRef>
+        </p:style>
+      </p:cxnSp>
+      <p:cxnSp>
+        <p:nvCxnSpPr>
+          <p:cNvPr id="11" name="直線コネクタ 10">
+            <a:extLst>
+              <a:ext uri="{FF2B5EF4-FFF2-40B4-BE49-F238E27FC236}">
+                <a16:creationId xmlns:a16="http://schemas.microsoft.com/office/drawing/2014/main" id="{CD8F9193-5EFC-9DDF-2CF3-ABB748BD9BC0}"/>
+              </a:ext>
+            </a:extLst>
+          </p:cNvPr>
+          <p:cNvCxnSpPr>
+            <a:cxnSpLocks/>
+          </p:cNvCxnSpPr>
+          <p:nvPr/>
+        </p:nvCxnSpPr>
+        <p:spPr>
+          <a:xfrm>
+            <a:off x="11960460" y="730872"/>
+            <a:ext cx="0" cy="5100062"/>
+          </a:xfrm>
+          <a:prstGeom prst="line">
+            <a:avLst/>
+          </a:prstGeom>
+          <a:ln w="25400">
+            <a:solidFill>
+              <a:schemeClr val="tx1">
+                <a:lumMod val="85000"/>
+                <a:lumOff val="15000"/>
+              </a:schemeClr>
+            </a:solidFill>
+          </a:ln>
+        </p:spPr>
+        <p:style>
+          <a:lnRef idx="1">
+            <a:schemeClr val="accent1"/>
+          </a:lnRef>
+          <a:fillRef idx="0">
+            <a:schemeClr val="accent1"/>
+          </a:fillRef>
+          <a:effectRef idx="0">
+            <a:schemeClr val="accent1"/>
+          </a:effectRef>
+          <a:fontRef idx="minor">
+            <a:schemeClr val="tx1"/>
+          </a:fontRef>
+        </p:style>
+      </p:cxnSp>
+      <p:cxnSp>
+        <p:nvCxnSpPr>
+          <p:cNvPr id="12" name="直線コネクタ 11">
+            <a:extLst>
+              <a:ext uri="{FF2B5EF4-FFF2-40B4-BE49-F238E27FC236}">
+                <a16:creationId xmlns:a16="http://schemas.microsoft.com/office/drawing/2014/main" id="{7445F3DD-E39D-099C-73EC-200F00070E92}"/>
+              </a:ext>
+            </a:extLst>
+          </p:cNvPr>
+          <p:cNvCxnSpPr>
+            <a:cxnSpLocks/>
+          </p:cNvCxnSpPr>
+          <p:nvPr/>
+        </p:nvCxnSpPr>
+        <p:spPr>
+          <a:xfrm>
+            <a:off x="6095999" y="4378616"/>
+            <a:ext cx="6040123" cy="0"/>
+          </a:xfrm>
+          <a:prstGeom prst="line">
+            <a:avLst/>
+          </a:prstGeom>
+          <a:ln w="25400">
+            <a:solidFill>
+              <a:schemeClr val="tx1">
+                <a:lumMod val="85000"/>
+                <a:lumOff val="15000"/>
+              </a:schemeClr>
+            </a:solidFill>
+          </a:ln>
+        </p:spPr>
+        <p:style>
+          <a:lnRef idx="1">
+            <a:schemeClr val="accent1"/>
+          </a:lnRef>
+          <a:fillRef idx="0">
+            <a:schemeClr val="accent1"/>
+          </a:fillRef>
+          <a:effectRef idx="0">
+            <a:schemeClr val="accent1"/>
+          </a:effectRef>
+          <a:fontRef idx="minor">
+            <a:schemeClr val="tx1"/>
+          </a:fontRef>
+        </p:style>
+      </p:cxnSp>
+      <p:sp>
+        <p:nvSpPr>
+          <p:cNvPr id="16" name="正方形/長方形 15">
+            <a:extLst>
+              <a:ext uri="{FF2B5EF4-FFF2-40B4-BE49-F238E27FC236}">
+                <a16:creationId xmlns:a16="http://schemas.microsoft.com/office/drawing/2014/main" id="{5A11D569-38F1-6C10-448D-DF6F7E9574FA}"/>
+              </a:ext>
+            </a:extLst>
+          </p:cNvPr>
+          <p:cNvSpPr/>
+          <p:nvPr/>
+        </p:nvSpPr>
+        <p:spPr>
+          <a:xfrm>
+            <a:off x="7579998" y="1079771"/>
+            <a:ext cx="148702" cy="1568992"/>
+          </a:xfrm>
+          <a:prstGeom prst="rect">
+            <a:avLst/>
+          </a:prstGeom>
+          <a:solidFill>
+            <a:srgbClr val="BEBFC3">
+              <a:alpha val="20000"/>
+            </a:srgbClr>
+          </a:solidFill>
+          <a:ln>
+            <a:noFill/>
+          </a:ln>
+          <a:effectLst>
+            <a:glow rad="254000">
+              <a:srgbClr val="BEBFC3">
+                <a:alpha val="60000"/>
+              </a:srgbClr>
+            </a:glow>
+          </a:effectLst>
+        </p:spPr>
+        <p:style>
+          <a:lnRef idx="2">
+            <a:schemeClr val="accent1">
+              <a:shade val="15000"/>
+            </a:schemeClr>
+          </a:lnRef>
+          <a:fillRef idx="1">
+            <a:schemeClr val="accent1"/>
+          </a:fillRef>
+          <a:effectRef idx="0">
+            <a:schemeClr val="accent1"/>
+          </a:effectRef>
+          <a:fontRef idx="minor">
+            <a:schemeClr val="lt1"/>
+          </a:fontRef>
+        </p:style>
+        <p:txBody>
+          <a:bodyPr rtlCol="0" anchor="ctr"/>
+          <a:lstStyle/>
+          <a:p>
+            <a:pPr algn="ctr"/>
+            <a:endParaRPr kumimoji="1" lang="ja-JP" altLang="en-US"/>
+          </a:p>
+        </p:txBody>
+      </p:sp>
+      <p:sp>
+        <p:nvSpPr>
+          <p:cNvPr id="17" name="正方形/長方形 16">
+            <a:extLst>
+              <a:ext uri="{FF2B5EF4-FFF2-40B4-BE49-F238E27FC236}">
+                <a16:creationId xmlns:a16="http://schemas.microsoft.com/office/drawing/2014/main" id="{03071D9B-76F0-87B1-7F33-4FDD142B1B4E}"/>
+              </a:ext>
+            </a:extLst>
+          </p:cNvPr>
+          <p:cNvSpPr/>
+          <p:nvPr/>
+        </p:nvSpPr>
+        <p:spPr>
+          <a:xfrm>
+            <a:off x="10452899" y="1079770"/>
+            <a:ext cx="148702" cy="1593145"/>
+          </a:xfrm>
+          <a:prstGeom prst="rect">
+            <a:avLst/>
+          </a:prstGeom>
+          <a:solidFill>
+            <a:srgbClr val="BEBFC3">
+              <a:alpha val="20000"/>
+            </a:srgbClr>
+          </a:solidFill>
+          <a:ln>
+            <a:noFill/>
+          </a:ln>
+          <a:effectLst>
+            <a:glow rad="127000">
+              <a:srgbClr val="BEBFC3">
+                <a:alpha val="60000"/>
+              </a:srgbClr>
+            </a:glow>
+          </a:effectLst>
+        </p:spPr>
+        <p:style>
+          <a:lnRef idx="2">
+            <a:schemeClr val="accent1">
+              <a:shade val="15000"/>
+            </a:schemeClr>
+          </a:lnRef>
+          <a:fillRef idx="1">
+            <a:schemeClr val="accent1"/>
+          </a:fillRef>
+          <a:effectRef idx="0">
+            <a:schemeClr val="accent1"/>
+          </a:effectRef>
+          <a:fontRef idx="minor">
+            <a:schemeClr val="lt1"/>
+          </a:fontRef>
+        </p:style>
+        <p:txBody>
+          <a:bodyPr rtlCol="0" anchor="ctr"/>
+          <a:lstStyle/>
+          <a:p>
+            <a:pPr algn="ctr"/>
+            <a:endParaRPr kumimoji="1" lang="ja-JP" altLang="en-US"/>
+          </a:p>
+        </p:txBody>
+      </p:sp>
+      <p:pic>
+        <p:nvPicPr>
+          <p:cNvPr id="23" name="図 22">
+            <a:extLst>
+              <a:ext uri="{FF2B5EF4-FFF2-40B4-BE49-F238E27FC236}">
+                <a16:creationId xmlns:a16="http://schemas.microsoft.com/office/drawing/2014/main" id="{E16265FD-1F7A-4416-1C83-8EAB9E4431E6}"/>
+              </a:ext>
+            </a:extLst>
+          </p:cNvPr>
+          <p:cNvPicPr>
+            <a:picLocks noChangeAspect="1"/>
+          </p:cNvPicPr>
+          <p:nvPr/>
+        </p:nvPicPr>
+        <p:blipFill>
+          <a:blip r:embed="rId3">
+            <a:extLst>
+              <a:ext uri="{28A0092B-C50C-407E-A947-70E740481C1C}">
+                <a14:useLocalDpi xmlns:a14="http://schemas.microsoft.com/office/drawing/2010/main" val="0"/>
+              </a:ext>
+            </a:extLst>
+          </a:blip>
+          <a:stretch>
+            <a:fillRect/>
+          </a:stretch>
+        </p:blipFill>
+        <p:spPr>
+          <a:xfrm>
+            <a:off x="9149537" y="430962"/>
+            <a:ext cx="2131494" cy="316499"/>
+          </a:xfrm>
+          <a:prstGeom prst="rect">
+            <a:avLst/>
+          </a:prstGeom>
+        </p:spPr>
+      </p:pic>
+      <p:pic>
+        <p:nvPicPr>
+          <p:cNvPr id="2050" name="Picture 2">
+            <a:extLst>
+              <a:ext uri="{FF2B5EF4-FFF2-40B4-BE49-F238E27FC236}">
+                <a16:creationId xmlns:a16="http://schemas.microsoft.com/office/drawing/2014/main" id="{BB00F0EF-D70D-4243-A12B-FB3CDCE89800}"/>
+              </a:ext>
+            </a:extLst>
+          </p:cNvPr>
+          <p:cNvPicPr>
+            <a:picLocks noChangeAspect="1" noChangeArrowheads="1"/>
+          </p:cNvPicPr>
+          <p:nvPr/>
+        </p:nvPicPr>
+        <p:blipFill>
+          <a:blip r:embed="rId4">
+            <a:extLst>
+              <a:ext uri="{28A0092B-C50C-407E-A947-70E740481C1C}">
+                <a14:useLocalDpi xmlns:a14="http://schemas.microsoft.com/office/drawing/2010/main" val="0"/>
+              </a:ext>
+            </a:extLst>
+          </a:blip>
+          <a:srcRect/>
+          <a:stretch>
+            <a:fillRect/>
+          </a:stretch>
+        </p:blipFill>
+        <p:spPr bwMode="auto">
+          <a:xfrm>
+            <a:off x="-1128837" y="-65736"/>
+            <a:ext cx="5790008" cy="3860005"/>
+          </a:xfrm>
+          <a:prstGeom prst="rect">
+            <a:avLst/>
+          </a:prstGeom>
+          <a:noFill/>
+          <a:extLst>
+            <a:ext uri="{909E8E84-426E-40DD-AFC4-6F175D3DCCD1}">
+              <a14:hiddenFill xmlns:a14="http://schemas.microsoft.com/office/drawing/2010/main">
+                <a:solidFill>
+                  <a:srgbClr val="FFFFFF"/>
+                </a:solidFill>
+              </a14:hiddenFill>
+            </a:ext>
+          </a:extLst>
+        </p:spPr>
+      </p:pic>
+      <p:pic>
+        <p:nvPicPr>
+          <p:cNvPr id="2" name="図 1">
+            <a:extLst>
+              <a:ext uri="{FF2B5EF4-FFF2-40B4-BE49-F238E27FC236}">
+                <a16:creationId xmlns:a16="http://schemas.microsoft.com/office/drawing/2014/main" id="{8343231E-6BED-AA7C-B824-3D8700A894C5}"/>
+              </a:ext>
+            </a:extLst>
+          </p:cNvPr>
+          <p:cNvPicPr>
+            <a:picLocks noChangeAspect="1"/>
+          </p:cNvPicPr>
+          <p:nvPr/>
+        </p:nvPicPr>
+        <p:blipFill>
+          <a:blip r:embed="rId5">
+            <a:extLst>
+              <a:ext uri="{BEBA8EAE-BF5A-486C-A8C5-ECC9F3942E4B}">
+                <a14:imgProps xmlns:a14="http://schemas.microsoft.com/office/drawing/2010/main">
+                  <a14:imgLayer r:embed="rId6">
+                    <a14:imgEffect>
+                      <a14:sharpenSoften amount="48000"/>
+                    </a14:imgEffect>
+                    <a14:imgEffect>
+                      <a14:brightnessContrast bright="24000"/>
+                    </a14:imgEffect>
+                  </a14:imgLayer>
+                </a14:imgProps>
+              </a:ext>
+              <a:ext uri="{28A0092B-C50C-407E-A947-70E740481C1C}">
+                <a14:useLocalDpi xmlns:a14="http://schemas.microsoft.com/office/drawing/2010/main" val="0"/>
+              </a:ext>
+            </a:extLst>
+          </a:blip>
+          <a:stretch>
+            <a:fillRect/>
+          </a:stretch>
+        </p:blipFill>
+        <p:spPr>
+          <a:xfrm>
+            <a:off x="6102155" y="1375519"/>
+            <a:ext cx="5888049" cy="1403467"/>
+          </a:xfrm>
+          <a:prstGeom prst="rect">
+            <a:avLst/>
+          </a:prstGeom>
+        </p:spPr>
+      </p:pic>
     </p:spTree>
     <p:extLst>
       <p:ext uri="{BB962C8B-B14F-4D97-AF65-F5344CB8AC3E}">
-        <p14:creationId xmlns:p14="http://schemas.microsoft.com/office/powerpoint/2010/main" val="1032035362"/>
+        <p14:creationId xmlns:p14="http://schemas.microsoft.com/office/powerpoint/2010/main" val="3824164978"/>
       </p:ext>
     </p:extLst>
   </p:cSld>
@@ -7628,6 +9205,146 @@
       </p:grpSpPr>
       <p:pic>
         <p:nvPicPr>
+          <p:cNvPr id="5" name="図 4">
+            <a:extLst>
+              <a:ext uri="{FF2B5EF4-FFF2-40B4-BE49-F238E27FC236}">
+                <a16:creationId xmlns:a16="http://schemas.microsoft.com/office/drawing/2014/main" id="{426268CA-F4A0-F713-DF5A-1B9F8E3F46AB}"/>
+              </a:ext>
+            </a:extLst>
+          </p:cNvPr>
+          <p:cNvPicPr>
+            <a:picLocks noChangeAspect="1"/>
+          </p:cNvPicPr>
+          <p:nvPr/>
+        </p:nvPicPr>
+        <p:blipFill>
+          <a:blip r:embed="rId2">
+            <a:extLst>
+              <a:ext uri="{28A0092B-C50C-407E-A947-70E740481C1C}">
+                <a14:useLocalDpi xmlns:a14="http://schemas.microsoft.com/office/drawing/2010/main" val="0"/>
+              </a:ext>
+            </a:extLst>
+          </a:blip>
+          <a:stretch>
+            <a:fillRect/>
+          </a:stretch>
+        </p:blipFill>
+        <p:spPr>
+          <a:xfrm>
+            <a:off x="233464" y="154471"/>
+            <a:ext cx="11444412" cy="2861103"/>
+          </a:xfrm>
+          <a:prstGeom prst="rect">
+            <a:avLst/>
+          </a:prstGeom>
+        </p:spPr>
+      </p:pic>
+      <p:sp>
+        <p:nvSpPr>
+          <p:cNvPr id="6" name="正方形/長方形 5">
+            <a:extLst>
+              <a:ext uri="{FF2B5EF4-FFF2-40B4-BE49-F238E27FC236}">
+                <a16:creationId xmlns:a16="http://schemas.microsoft.com/office/drawing/2014/main" id="{DC468BBB-5D39-B394-3177-16992010CB30}"/>
+              </a:ext>
+            </a:extLst>
+          </p:cNvPr>
+          <p:cNvSpPr/>
+          <p:nvPr/>
+        </p:nvSpPr>
+        <p:spPr>
+          <a:xfrm>
+            <a:off x="3433862" y="2715188"/>
+            <a:ext cx="4679006" cy="3988341"/>
+          </a:xfrm>
+          <a:prstGeom prst="rect">
+            <a:avLst/>
+          </a:prstGeom>
+          <a:gradFill>
+            <a:gsLst>
+              <a:gs pos="70000">
+                <a:srgbClr val="585A5E"/>
+              </a:gs>
+              <a:gs pos="0">
+                <a:srgbClr val="8A8572"/>
+              </a:gs>
+              <a:gs pos="39000">
+                <a:srgbClr val="464646"/>
+              </a:gs>
+              <a:gs pos="100000">
+                <a:srgbClr val="81776B"/>
+              </a:gs>
+            </a:gsLst>
+            <a:lin ang="0" scaled="0"/>
+          </a:gradFill>
+          <a:ln>
+            <a:noFill/>
+          </a:ln>
+        </p:spPr>
+        <p:style>
+          <a:lnRef idx="2">
+            <a:schemeClr val="accent1">
+              <a:shade val="15000"/>
+            </a:schemeClr>
+          </a:lnRef>
+          <a:fillRef idx="1">
+            <a:schemeClr val="accent1"/>
+          </a:fillRef>
+          <a:effectRef idx="0">
+            <a:schemeClr val="accent1"/>
+          </a:effectRef>
+          <a:fontRef idx="minor">
+            <a:schemeClr val="lt1"/>
+          </a:fontRef>
+        </p:style>
+        <p:txBody>
+          <a:bodyPr rtlCol="0" anchor="ctr"/>
+          <a:lstStyle/>
+          <a:p>
+            <a:pPr algn="ctr"/>
+            <a:endParaRPr kumimoji="1" lang="ja-JP" altLang="en-US"/>
+          </a:p>
+        </p:txBody>
+      </p:sp>
+    </p:spTree>
+    <p:extLst>
+      <p:ext uri="{BB962C8B-B14F-4D97-AF65-F5344CB8AC3E}">
+        <p14:creationId xmlns:p14="http://schemas.microsoft.com/office/powerpoint/2010/main" val="1032035362"/>
+      </p:ext>
+    </p:extLst>
+  </p:cSld>
+  <p:clrMapOvr>
+    <a:masterClrMapping/>
+  </p:clrMapOvr>
+</p:sld>
+</file>
+
+<file path=ppt/slides/slide7.xml><?xml version="1.0" encoding="utf-8"?>
+<p:sld xmlns:a="http://schemas.openxmlformats.org/drawingml/2006/main" xmlns:r="http://schemas.openxmlformats.org/officeDocument/2006/relationships" xmlns:p="http://schemas.openxmlformats.org/presentationml/2006/main">
+  <p:cSld>
+    <p:bg>
+      <p:bgPr>
+        <a:solidFill>
+          <a:srgbClr val="FF00FF"/>
+        </a:solidFill>
+        <a:effectLst/>
+      </p:bgPr>
+    </p:bg>
+    <p:spTree>
+      <p:nvGrpSpPr>
+        <p:cNvPr id="1" name=""/>
+        <p:cNvGrpSpPr/>
+        <p:nvPr/>
+      </p:nvGrpSpPr>
+      <p:grpSpPr>
+        <a:xfrm>
+          <a:off x="0" y="0"/>
+          <a:ext cx="0" cy="0"/>
+          <a:chOff x="0" y="0"/>
+          <a:chExt cx="0" cy="0"/>
+        </a:xfrm>
+      </p:grpSpPr>
+      <p:pic>
+        <p:nvPicPr>
           <p:cNvPr id="7" name="図 6">
             <a:extLst>
               <a:ext uri="{FF2B5EF4-FFF2-40B4-BE49-F238E27FC236}">
@@ -7735,6 +9452,334 @@
     <p:extLst>
       <p:ext uri="{BB962C8B-B14F-4D97-AF65-F5344CB8AC3E}">
         <p14:creationId xmlns:p14="http://schemas.microsoft.com/office/powerpoint/2010/main" val="3801766646"/>
+      </p:ext>
+    </p:extLst>
+  </p:cSld>
+  <p:clrMapOvr>
+    <a:masterClrMapping/>
+  </p:clrMapOvr>
+</p:sld>
+</file>
+
+<file path=ppt/slides/slide8.xml><?xml version="1.0" encoding="utf-8"?>
+<p:sld xmlns:a="http://schemas.openxmlformats.org/drawingml/2006/main" xmlns:r="http://schemas.openxmlformats.org/officeDocument/2006/relationships" xmlns:p="http://schemas.openxmlformats.org/presentationml/2006/main">
+  <p:cSld>
+    <p:spTree>
+      <p:nvGrpSpPr>
+        <p:cNvPr id="1" name=""/>
+        <p:cNvGrpSpPr/>
+        <p:nvPr/>
+      </p:nvGrpSpPr>
+      <p:grpSpPr>
+        <a:xfrm>
+          <a:off x="0" y="0"/>
+          <a:ext cx="0" cy="0"/>
+          <a:chOff x="0" y="0"/>
+          <a:chExt cx="0" cy="0"/>
+        </a:xfrm>
+      </p:grpSpPr>
+      <p:pic>
+        <p:nvPicPr>
+          <p:cNvPr id="5" name="Picture 4">
+            <a:extLst>
+              <a:ext uri="{FF2B5EF4-FFF2-40B4-BE49-F238E27FC236}">
+                <a16:creationId xmlns:a16="http://schemas.microsoft.com/office/drawing/2014/main" id="{C9B74DB4-035F-2064-E6D0-A7B583F631D7}"/>
+              </a:ext>
+            </a:extLst>
+          </p:cNvPr>
+          <p:cNvPicPr>
+            <a:picLocks noChangeAspect="1"/>
+          </p:cNvPicPr>
+          <p:nvPr/>
+        </p:nvPicPr>
+        <p:blipFill>
+          <a:blip r:embed="rId3">
+            <a:extLst>
+              <a:ext uri="{28A0092B-C50C-407E-A947-70E740481C1C}">
+                <a14:useLocalDpi xmlns:a14="http://schemas.microsoft.com/office/drawing/2010/main" val="0"/>
+              </a:ext>
+            </a:extLst>
+          </a:blip>
+          <a:stretch>
+            <a:fillRect/>
+          </a:stretch>
+        </p:blipFill>
+        <p:spPr>
+          <a:xfrm rot="5400000">
+            <a:off x="2658397" y="161004"/>
+            <a:ext cx="1506793" cy="2438400"/>
+          </a:xfrm>
+          <a:prstGeom prst="rect">
+            <a:avLst/>
+          </a:prstGeom>
+        </p:spPr>
+      </p:pic>
+      <p:pic>
+        <p:nvPicPr>
+          <p:cNvPr id="6" name="Picture 5">
+            <a:extLst>
+              <a:ext uri="{FF2B5EF4-FFF2-40B4-BE49-F238E27FC236}">
+                <a16:creationId xmlns:a16="http://schemas.microsoft.com/office/drawing/2014/main" id="{741E400B-39A9-54B6-8370-89B050E6A4C2}"/>
+              </a:ext>
+            </a:extLst>
+          </p:cNvPr>
+          <p:cNvPicPr>
+            <a:picLocks noChangeAspect="1"/>
+          </p:cNvPicPr>
+          <p:nvPr/>
+        </p:nvPicPr>
+        <p:blipFill>
+          <a:blip r:embed="rId3">
+            <a:extLst>
+              <a:ext uri="{28A0092B-C50C-407E-A947-70E740481C1C}">
+                <a14:useLocalDpi xmlns:a14="http://schemas.microsoft.com/office/drawing/2010/main" val="0"/>
+              </a:ext>
+            </a:extLst>
+          </a:blip>
+          <a:srcRect t="5705"/>
+          <a:stretch/>
+        </p:blipFill>
+        <p:spPr>
+          <a:xfrm rot="5400000" flipV="1">
+            <a:off x="4846324" y="230569"/>
+            <a:ext cx="1506793" cy="2299272"/>
+          </a:xfrm>
+          <a:prstGeom prst="rect">
+            <a:avLst/>
+          </a:prstGeom>
+        </p:spPr>
+      </p:pic>
+      <p:pic>
+        <p:nvPicPr>
+          <p:cNvPr id="1026" name="Picture 2" descr="会話はマキマに聞かれている - チェンソーマン | アル">
+            <a:extLst>
+              <a:ext uri="{FF2B5EF4-FFF2-40B4-BE49-F238E27FC236}">
+                <a16:creationId xmlns:a16="http://schemas.microsoft.com/office/drawing/2014/main" id="{CD99FE36-6FBB-3FEF-0394-E02C9474074D}"/>
+              </a:ext>
+            </a:extLst>
+          </p:cNvPr>
+          <p:cNvPicPr>
+            <a:picLocks noChangeAspect="1" noChangeArrowheads="1"/>
+          </p:cNvPicPr>
+          <p:nvPr/>
+        </p:nvPicPr>
+        <p:blipFill>
+          <a:blip r:embed="rId4">
+            <a:extLst>
+              <a:ext uri="{28A0092B-C50C-407E-A947-70E740481C1C}">
+                <a14:useLocalDpi xmlns:a14="http://schemas.microsoft.com/office/drawing/2010/main" val="0"/>
+              </a:ext>
+            </a:extLst>
+          </a:blip>
+          <a:srcRect/>
+          <a:stretch>
+            <a:fillRect/>
+          </a:stretch>
+        </p:blipFill>
+        <p:spPr bwMode="auto">
+          <a:xfrm>
+            <a:off x="2407919" y="2245252"/>
+            <a:ext cx="4797425" cy="4409548"/>
+          </a:xfrm>
+          <a:prstGeom prst="rect">
+            <a:avLst/>
+          </a:prstGeom>
+          <a:noFill/>
+          <a:extLst>
+            <a:ext uri="{909E8E84-426E-40DD-AFC4-6F175D3DCCD1}">
+              <a14:hiddenFill xmlns:a14="http://schemas.microsoft.com/office/drawing/2010/main">
+                <a:solidFill>
+                  <a:srgbClr val="FFFFFF"/>
+                </a:solidFill>
+              </a14:hiddenFill>
+            </a:ext>
+          </a:extLst>
+        </p:spPr>
+      </p:pic>
+      <p:sp>
+        <p:nvSpPr>
+          <p:cNvPr id="2" name="TextBox 1">
+            <a:extLst>
+              <a:ext uri="{FF2B5EF4-FFF2-40B4-BE49-F238E27FC236}">
+                <a16:creationId xmlns:a16="http://schemas.microsoft.com/office/drawing/2014/main" id="{9488EC5E-D0D8-01DE-482E-CE2CF81C8D08}"/>
+              </a:ext>
+            </a:extLst>
+          </p:cNvPr>
+          <p:cNvSpPr txBox="1"/>
+          <p:nvPr/>
+        </p:nvSpPr>
+        <p:spPr>
+          <a:xfrm>
+            <a:off x="7584440" y="3089910"/>
+            <a:ext cx="430530" cy="646331"/>
+          </a:xfrm>
+          <a:prstGeom prst="rect">
+            <a:avLst/>
+          </a:prstGeom>
+          <a:noFill/>
+        </p:spPr>
+        <p:txBody>
+          <a:bodyPr wrap="square" rtlCol="0">
+            <a:spAutoFit/>
+          </a:bodyPr>
+          <a:lstStyle/>
+          <a:p>
+            <a:r>
+              <a:rPr kumimoji="1" lang="ja-JP" altLang="en-US" b="1" dirty="0">
+                <a:latin typeface="ひとりゴシック" panose="02000609000000000000" pitchFamily="1" charset="-128"/>
+                <a:ea typeface="ひとりゴシック" panose="02000609000000000000" pitchFamily="1" charset="-128"/>
+              </a:rPr>
+              <a:t>泰道</a:t>
+            </a:r>
+          </a:p>
+        </p:txBody>
+      </p:sp>
+      <p:pic>
+        <p:nvPicPr>
+          <p:cNvPr id="7" name="Picture 6">
+            <a:extLst>
+              <a:ext uri="{FF2B5EF4-FFF2-40B4-BE49-F238E27FC236}">
+                <a16:creationId xmlns:a16="http://schemas.microsoft.com/office/drawing/2014/main" id="{1F153C9D-469A-4CDF-778B-F2461F271C69}"/>
+              </a:ext>
+            </a:extLst>
+          </p:cNvPr>
+          <p:cNvPicPr>
+            <a:picLocks noChangeAspect="1"/>
+          </p:cNvPicPr>
+          <p:nvPr/>
+        </p:nvPicPr>
+        <p:blipFill>
+          <a:blip r:embed="rId5"/>
+          <a:stretch>
+            <a:fillRect/>
+          </a:stretch>
+        </p:blipFill>
+        <p:spPr>
+          <a:xfrm>
+            <a:off x="7974966" y="3372485"/>
+            <a:ext cx="838200" cy="1384935"/>
+          </a:xfrm>
+          <a:prstGeom prst="rect">
+            <a:avLst/>
+          </a:prstGeom>
+        </p:spPr>
+      </p:pic>
+      <p:sp>
+        <p:nvSpPr>
+          <p:cNvPr id="10" name="Rectangle 9">
+            <a:extLst>
+              <a:ext uri="{FF2B5EF4-FFF2-40B4-BE49-F238E27FC236}">
+                <a16:creationId xmlns:a16="http://schemas.microsoft.com/office/drawing/2014/main" id="{5F3FA2BC-9CE6-EDB2-8DCC-43DCAE60B836}"/>
+              </a:ext>
+            </a:extLst>
+          </p:cNvPr>
+          <p:cNvSpPr/>
+          <p:nvPr/>
+        </p:nvSpPr>
+        <p:spPr>
+          <a:xfrm>
+            <a:off x="5044440" y="3876039"/>
+            <a:ext cx="314960" cy="755015"/>
+          </a:xfrm>
+          <a:prstGeom prst="rect">
+            <a:avLst/>
+          </a:prstGeom>
+          <a:solidFill>
+            <a:srgbClr val="FFFFFF"/>
+          </a:solidFill>
+          <a:ln>
+            <a:noFill/>
+          </a:ln>
+        </p:spPr>
+        <p:style>
+          <a:lnRef idx="2">
+            <a:schemeClr val="accent1">
+              <a:shade val="15000"/>
+            </a:schemeClr>
+          </a:lnRef>
+          <a:fillRef idx="1">
+            <a:schemeClr val="accent1"/>
+          </a:fillRef>
+          <a:effectRef idx="0">
+            <a:schemeClr val="accent1"/>
+          </a:effectRef>
+          <a:fontRef idx="minor">
+            <a:schemeClr val="lt1"/>
+          </a:fontRef>
+        </p:style>
+        <p:txBody>
+          <a:bodyPr rtlCol="0" anchor="ctr"/>
+          <a:lstStyle/>
+          <a:p>
+            <a:pPr algn="ctr"/>
+            <a:endParaRPr kumimoji="1" lang="ja-JP" altLang="en-US"/>
+          </a:p>
+        </p:txBody>
+      </p:sp>
+      <p:pic>
+        <p:nvPicPr>
+          <p:cNvPr id="9" name="Picture 8">
+            <a:extLst>
+              <a:ext uri="{FF2B5EF4-FFF2-40B4-BE49-F238E27FC236}">
+                <a16:creationId xmlns:a16="http://schemas.microsoft.com/office/drawing/2014/main" id="{01D57911-A60A-C02F-B879-A37BB7617010}"/>
+              </a:ext>
+            </a:extLst>
+          </p:cNvPr>
+          <p:cNvPicPr>
+            <a:picLocks noChangeAspect="1"/>
+          </p:cNvPicPr>
+          <p:nvPr/>
+        </p:nvPicPr>
+        <p:blipFill>
+          <a:blip r:embed="rId6"/>
+          <a:stretch>
+            <a:fillRect/>
+          </a:stretch>
+        </p:blipFill>
+        <p:spPr>
+          <a:xfrm>
+            <a:off x="7485823" y="3520395"/>
+            <a:ext cx="825125" cy="996842"/>
+          </a:xfrm>
+          <a:prstGeom prst="rect">
+            <a:avLst/>
+          </a:prstGeom>
+        </p:spPr>
+      </p:pic>
+      <p:pic>
+        <p:nvPicPr>
+          <p:cNvPr id="12" name="Picture 11">
+            <a:extLst>
+              <a:ext uri="{FF2B5EF4-FFF2-40B4-BE49-F238E27FC236}">
+                <a16:creationId xmlns:a16="http://schemas.microsoft.com/office/drawing/2014/main" id="{E1503643-FAEF-AB3B-B501-73419CBA74E1}"/>
+              </a:ext>
+            </a:extLst>
+          </p:cNvPr>
+          <p:cNvPicPr>
+            <a:picLocks noChangeAspect="1"/>
+          </p:cNvPicPr>
+          <p:nvPr/>
+        </p:nvPicPr>
+        <p:blipFill>
+          <a:blip r:embed="rId7"/>
+          <a:stretch>
+            <a:fillRect/>
+          </a:stretch>
+        </p:blipFill>
+        <p:spPr>
+          <a:xfrm>
+            <a:off x="4846320" y="3794433"/>
+            <a:ext cx="711200" cy="1001568"/>
+          </a:xfrm>
+          <a:prstGeom prst="rect">
+            <a:avLst/>
+          </a:prstGeom>
+        </p:spPr>
+      </p:pic>
+    </p:spTree>
+    <p:extLst>
+      <p:ext uri="{BB962C8B-B14F-4D97-AF65-F5344CB8AC3E}">
+        <p14:creationId xmlns:p14="http://schemas.microsoft.com/office/powerpoint/2010/main" val="984372183"/>
       </p:ext>
     </p:extLst>
   </p:cSld>
@@ -8037,4 +10082,299 @@
     </a:ext>
   </a:extLst>
 </a:theme>
+</file>
+
+<file path=ppt/theme/theme2.xml><?xml version="1.0" encoding="utf-8"?>
+<a:theme xmlns:a="http://schemas.openxmlformats.org/drawingml/2006/main" name="Office Theme">
+  <a:themeElements>
+    <a:clrScheme name="Office">
+      <a:dk1>
+        <a:sysClr val="windowText" lastClr="000000"/>
+      </a:dk1>
+      <a:lt1>
+        <a:sysClr val="window" lastClr="FFFFFF"/>
+      </a:lt1>
+      <a:dk2>
+        <a:srgbClr val="44546A"/>
+      </a:dk2>
+      <a:lt2>
+        <a:srgbClr val="E7E6E6"/>
+      </a:lt2>
+      <a:accent1>
+        <a:srgbClr val="4472C4"/>
+      </a:accent1>
+      <a:accent2>
+        <a:srgbClr val="ED7D31"/>
+      </a:accent2>
+      <a:accent3>
+        <a:srgbClr val="A5A5A5"/>
+      </a:accent3>
+      <a:accent4>
+        <a:srgbClr val="FFC000"/>
+      </a:accent4>
+      <a:accent5>
+        <a:srgbClr val="5B9BD5"/>
+      </a:accent5>
+      <a:accent6>
+        <a:srgbClr val="70AD47"/>
+      </a:accent6>
+      <a:hlink>
+        <a:srgbClr val="0563C1"/>
+      </a:hlink>
+      <a:folHlink>
+        <a:srgbClr val="954F72"/>
+      </a:folHlink>
+    </a:clrScheme>
+    <a:fontScheme name="Office">
+      <a:majorFont>
+        <a:latin typeface="游ゴシック Light" panose="020F0302020204030204"/>
+        <a:ea typeface=""/>
+        <a:cs typeface=""/>
+        <a:font script="Jpan" typeface="游ゴシック Light"/>
+        <a:font script="Hang" typeface="맑은 고딕"/>
+        <a:font script="Hans" typeface="等线 Light"/>
+        <a:font script="Hant" typeface="新細明體"/>
+        <a:font script="Arab" typeface="Times New Roman"/>
+        <a:font script="Hebr" typeface="Times New Roman"/>
+        <a:font script="Thai" typeface="Angsana New"/>
+        <a:font script="Ethi" typeface="Nyala"/>
+        <a:font script="Beng" typeface="Vrinda"/>
+        <a:font script="Gujr" typeface="Shruti"/>
+        <a:font script="Khmr" typeface="MoolBoran"/>
+        <a:font script="Knda" typeface="Tunga"/>
+        <a:font script="Guru" typeface="Raavi"/>
+        <a:font script="Cans" typeface="Euphemia"/>
+        <a:font script="Cher" typeface="Plantagenet Cherokee"/>
+        <a:font script="Yiii" typeface="Microsoft Yi Baiti"/>
+        <a:font script="Tibt" typeface="Microsoft Himalaya"/>
+        <a:font script="Thaa" typeface="MV Boli"/>
+        <a:font script="Deva" typeface="Mangal"/>
+        <a:font script="Telu" typeface="Gautami"/>
+        <a:font script="Taml" typeface="Latha"/>
+        <a:font script="Syrc" typeface="Estrangelo Edessa"/>
+        <a:font script="Orya" typeface="Kalinga"/>
+        <a:font script="Mlym" typeface="Kartika"/>
+        <a:font script="Laoo" typeface="DokChampa"/>
+        <a:font script="Sinh" typeface="Iskoola Pota"/>
+        <a:font script="Mong" typeface="Mongolian Baiti"/>
+        <a:font script="Viet" typeface="Times New Roman"/>
+        <a:font script="Uigh" typeface="Microsoft Uighur"/>
+        <a:font script="Geor" typeface="Sylfaen"/>
+        <a:font script="Armn" typeface="Arial"/>
+        <a:font script="Bugi" typeface="Leelawadee UI"/>
+        <a:font script="Bopo" typeface="Microsoft JhengHei"/>
+        <a:font script="Java" typeface="Javanese Text"/>
+        <a:font script="Lisu" typeface="Segoe UI"/>
+        <a:font script="Mymr" typeface="Myanmar Text"/>
+        <a:font script="Nkoo" typeface="Ebrima"/>
+        <a:font script="Olck" typeface="Nirmala UI"/>
+        <a:font script="Osma" typeface="Ebrima"/>
+        <a:font script="Phag" typeface="Phagspa"/>
+        <a:font script="Syrn" typeface="Estrangelo Edessa"/>
+        <a:font script="Syrj" typeface="Estrangelo Edessa"/>
+        <a:font script="Syre" typeface="Estrangelo Edessa"/>
+        <a:font script="Sora" typeface="Nirmala UI"/>
+        <a:font script="Tale" typeface="Microsoft Tai Le"/>
+        <a:font script="Talu" typeface="Microsoft New Tai Lue"/>
+        <a:font script="Tfng" typeface="Ebrima"/>
+      </a:majorFont>
+      <a:minorFont>
+        <a:latin typeface="游ゴシック" panose="020F0502020204030204"/>
+        <a:ea typeface=""/>
+        <a:cs typeface=""/>
+        <a:font script="Jpan" typeface="游ゴシック"/>
+        <a:font script="Hang" typeface="맑은 고딕"/>
+        <a:font script="Hans" typeface="等线"/>
+        <a:font script="Hant" typeface="新細明體"/>
+        <a:font script="Arab" typeface="Arial"/>
+        <a:font script="Hebr" typeface="Arial"/>
+        <a:font script="Thai" typeface="Cordia New"/>
+        <a:font script="Ethi" typeface="Nyala"/>
+        <a:font script="Beng" typeface="Vrinda"/>
+        <a:font script="Gujr" typeface="Shruti"/>
+        <a:font script="Khmr" typeface="DaunPenh"/>
+        <a:font script="Knda" typeface="Tunga"/>
+        <a:font script="Guru" typeface="Raavi"/>
+        <a:font script="Cans" typeface="Euphemia"/>
+        <a:font script="Cher" typeface="Plantagenet Cherokee"/>
+        <a:font script="Yiii" typeface="Microsoft Yi Baiti"/>
+        <a:font script="Tibt" typeface="Microsoft Himalaya"/>
+        <a:font script="Thaa" typeface="MV Boli"/>
+        <a:font script="Deva" typeface="Mangal"/>
+        <a:font script="Telu" typeface="Gautami"/>
+        <a:font script="Taml" typeface="Latha"/>
+        <a:font script="Syrc" typeface="Estrangelo Edessa"/>
+        <a:font script="Orya" typeface="Kalinga"/>
+        <a:font script="Mlym" typeface="Kartika"/>
+        <a:font script="Laoo" typeface="DokChampa"/>
+        <a:font script="Sinh" typeface="Iskoola Pota"/>
+        <a:font script="Mong" typeface="Mongolian Baiti"/>
+        <a:font script="Viet" typeface="Arial"/>
+        <a:font script="Uigh" typeface="Microsoft Uighur"/>
+        <a:font script="Geor" typeface="Sylfaen"/>
+        <a:font script="Armn" typeface="Arial"/>
+        <a:font script="Bugi" typeface="Leelawadee UI"/>
+        <a:font script="Bopo" typeface="Microsoft JhengHei"/>
+        <a:font script="Java" typeface="Javanese Text"/>
+        <a:font script="Lisu" typeface="Segoe UI"/>
+        <a:font script="Mymr" typeface="Myanmar Text"/>
+        <a:font script="Nkoo" typeface="Ebrima"/>
+        <a:font script="Olck" typeface="Nirmala UI"/>
+        <a:font script="Osma" typeface="Ebrima"/>
+        <a:font script="Phag" typeface="Phagspa"/>
+        <a:font script="Syrn" typeface="Estrangelo Edessa"/>
+        <a:font script="Syrj" typeface="Estrangelo Edessa"/>
+        <a:font script="Syre" typeface="Estrangelo Edessa"/>
+        <a:font script="Sora" typeface="Nirmala UI"/>
+        <a:font script="Tale" typeface="Microsoft Tai Le"/>
+        <a:font script="Talu" typeface="Microsoft New Tai Lue"/>
+        <a:font script="Tfng" typeface="Ebrima"/>
+      </a:minorFont>
+    </a:fontScheme>
+    <a:fmtScheme name="Office">
+      <a:fillStyleLst>
+        <a:solidFill>
+          <a:schemeClr val="phClr"/>
+        </a:solidFill>
+        <a:gradFill rotWithShape="1">
+          <a:gsLst>
+            <a:gs pos="0">
+              <a:schemeClr val="phClr">
+                <a:lumMod val="110000"/>
+                <a:satMod val="105000"/>
+                <a:tint val="67000"/>
+              </a:schemeClr>
+            </a:gs>
+            <a:gs pos="50000">
+              <a:schemeClr val="phClr">
+                <a:lumMod val="105000"/>
+                <a:satMod val="103000"/>
+                <a:tint val="73000"/>
+              </a:schemeClr>
+            </a:gs>
+            <a:gs pos="100000">
+              <a:schemeClr val="phClr">
+                <a:lumMod val="105000"/>
+                <a:satMod val="109000"/>
+                <a:tint val="81000"/>
+              </a:schemeClr>
+            </a:gs>
+          </a:gsLst>
+          <a:lin ang="5400000" scaled="0"/>
+        </a:gradFill>
+        <a:gradFill rotWithShape="1">
+          <a:gsLst>
+            <a:gs pos="0">
+              <a:schemeClr val="phClr">
+                <a:satMod val="103000"/>
+                <a:lumMod val="102000"/>
+                <a:tint val="94000"/>
+              </a:schemeClr>
+            </a:gs>
+            <a:gs pos="50000">
+              <a:schemeClr val="phClr">
+                <a:satMod val="110000"/>
+                <a:lumMod val="100000"/>
+                <a:shade val="100000"/>
+              </a:schemeClr>
+            </a:gs>
+            <a:gs pos="100000">
+              <a:schemeClr val="phClr">
+                <a:lumMod val="99000"/>
+                <a:satMod val="120000"/>
+                <a:shade val="78000"/>
+              </a:schemeClr>
+            </a:gs>
+          </a:gsLst>
+          <a:lin ang="5400000" scaled="0"/>
+        </a:gradFill>
+      </a:fillStyleLst>
+      <a:lnStyleLst>
+        <a:ln w="6350" cap="flat" cmpd="sng" algn="ctr">
+          <a:solidFill>
+            <a:schemeClr val="phClr"/>
+          </a:solidFill>
+          <a:prstDash val="solid"/>
+          <a:miter lim="800000"/>
+        </a:ln>
+        <a:ln w="12700" cap="flat" cmpd="sng" algn="ctr">
+          <a:solidFill>
+            <a:schemeClr val="phClr"/>
+          </a:solidFill>
+          <a:prstDash val="solid"/>
+          <a:miter lim="800000"/>
+        </a:ln>
+        <a:ln w="19050" cap="flat" cmpd="sng" algn="ctr">
+          <a:solidFill>
+            <a:schemeClr val="phClr"/>
+          </a:solidFill>
+          <a:prstDash val="solid"/>
+          <a:miter lim="800000"/>
+        </a:ln>
+      </a:lnStyleLst>
+      <a:effectStyleLst>
+        <a:effectStyle>
+          <a:effectLst/>
+        </a:effectStyle>
+        <a:effectStyle>
+          <a:effectLst/>
+        </a:effectStyle>
+        <a:effectStyle>
+          <a:effectLst>
+            <a:outerShdw blurRad="57150" dist="19050" dir="5400000" algn="ctr" rotWithShape="0">
+              <a:srgbClr val="000000">
+                <a:alpha val="63000"/>
+              </a:srgbClr>
+            </a:outerShdw>
+          </a:effectLst>
+        </a:effectStyle>
+      </a:effectStyleLst>
+      <a:bgFillStyleLst>
+        <a:solidFill>
+          <a:schemeClr val="phClr"/>
+        </a:solidFill>
+        <a:solidFill>
+          <a:schemeClr val="phClr">
+            <a:tint val="95000"/>
+            <a:satMod val="170000"/>
+          </a:schemeClr>
+        </a:solidFill>
+        <a:gradFill rotWithShape="1">
+          <a:gsLst>
+            <a:gs pos="0">
+              <a:schemeClr val="phClr">
+                <a:tint val="93000"/>
+                <a:satMod val="150000"/>
+                <a:shade val="98000"/>
+                <a:lumMod val="102000"/>
+              </a:schemeClr>
+            </a:gs>
+            <a:gs pos="50000">
+              <a:schemeClr val="phClr">
+                <a:tint val="98000"/>
+                <a:satMod val="130000"/>
+                <a:shade val="90000"/>
+                <a:lumMod val="103000"/>
+              </a:schemeClr>
+            </a:gs>
+            <a:gs pos="100000">
+              <a:schemeClr val="phClr">
+                <a:shade val="63000"/>
+                <a:satMod val="120000"/>
+              </a:schemeClr>
+            </a:gs>
+          </a:gsLst>
+          <a:lin ang="5400000" scaled="0"/>
+        </a:gradFill>
+      </a:bgFillStyleLst>
+    </a:fmtScheme>
+  </a:themeElements>
+  <a:objectDefaults/>
+  <a:extraClrSchemeLst/>
+  <a:extLst>
+    <a:ext uri="{05A4C25C-085E-4340-85A3-A5531E510DB2}">
+      <thm15:themeFamily xmlns:thm15="http://schemas.microsoft.com/office/thememl/2012/main" name="Office Theme" id="{62F939B6-93AF-4DB8-9C6B-D6C7DFDC589F}" vid="{4A3C46E8-61CC-4603-A589-7422A47A8E4A}"/>
+    </a:ext>
+  </a:extLst>
+</a:theme>
 </file>